--- a/太陽光出力制御_九州沖縄検証_claude.pptx
+++ b/太陽光出力制御_九州沖縄検証_claude.pptx
@@ -20,9 +20,11 @@
     <p:sldId id="268" r:id="rId14"/>
     <p:sldId id="269" r:id="rId15"/>
     <p:sldId id="270" r:id="rId16"/>
+    <p:sldId id="271" r:id="rId17"/>
+    <p:sldId id="272" r:id="rId18"/>
   </p:sldIdLst>
   <p:notesMasterIdLst>
-    <p:notesMasterId r:id="rId17"/>
+    <p:notesMasterId r:id="rId19"/>
   </p:notesMasterIdLst>
   <p:sldSz cx="12192000" cy="6858000"/>
   <p:notesSz cx="6858000" cy="12192000"/>
@@ -1615,7 +1617,7 @@
           <a:p>
             <a:r>
               <a:rPr lang="en-US" dirty="0"/>
-              <a:t/>
+              <a:t>出典: CORRECTIONS_LOG.md の訂正一覧</a:t>
             </a:r>
             <a:endParaRPr lang="en-US" dirty="0"/>
           </a:p>
@@ -1703,7 +1705,7 @@
           <a:p>
             <a:r>
               <a:rPr lang="en-US" dirty="0"/>
-              <a:t/>
+              <a:t>出典: CORRECTIONS_LOG.md の訂正一覧</a:t>
             </a:r>
             <a:endParaRPr lang="en-US" dirty="0"/>
           </a:p>
@@ -1727,6 +1729,182 @@
             <a:fld id="{F7021451-1387-4CA6-816F-3879F97B5CBC}" type="slidenum">
               <a:rPr lang="en-US"/>
               <a:t>15</a:t>
+            </a:fld>
+            <a:endParaRPr lang="en-US"/>
+          </a:p>
+        </p:txBody>
+      </p:sp>
+    </p:spTree>
+    <p:extLst>
+      <p:ext uri="{BB962C8B-B14F-4D97-AF65-F5344CB8AC3E}">
+        <p14:creationId xmlns:p14="http://schemas.microsoft.com/office/powerpoint/2010/main" val="1024086991"/>
+      </p:ext>
+    </p:extLst>
+  </p:cSld>
+  <p:clrMapOvr>
+    <a:masterClrMapping/>
+  </p:clrMapOvr>
+</p:notes>
+</file>
+
+<file path=ppt/notesSlides/notesSlide16.xml><?xml version="1.0" encoding="utf-8"?>
+<p:notes xmlns:a="http://schemas.openxmlformats.org/drawingml/2006/main" xmlns:r="http://schemas.openxmlformats.org/officeDocument/2006/relationships" xmlns:p="http://schemas.openxmlformats.org/presentationml/2006/main">
+  <p:cSld>
+    <p:spTree>
+      <p:nvGrpSpPr>
+        <p:cNvPr id="1" name=""/>
+        <p:cNvGrpSpPr/>
+        <p:nvPr/>
+      </p:nvGrpSpPr>
+      <p:grpSpPr>
+        <a:xfrm>
+          <a:off x="0" y="0"/>
+          <a:ext cx="0" cy="0"/>
+          <a:chOff x="0" y="0"/>
+          <a:chExt cx="0" cy="0"/>
+        </a:xfrm>
+      </p:grpSpPr>
+      <p:sp>
+        <p:nvSpPr>
+          <p:cNvPr id="2" name="Slide Image Placeholder 1"/>
+          <p:cNvSpPr>
+            <a:spLocks noGrp="1" noRot="1" noChangeAspect="1"/>
+          </p:cNvSpPr>
+          <p:nvPr>
+            <p:ph type="sldImg"/>
+          </p:nvPr>
+        </p:nvSpPr>
+        <p:spPr/>
+      </p:sp>
+      <p:sp>
+        <p:nvSpPr>
+          <p:cNvPr id="3" name="Notes Placeholder 2"/>
+          <p:cNvSpPr>
+            <a:spLocks noGrp="1"/>
+          </p:cNvSpPr>
+          <p:nvPr>
+            <p:ph type="body" idx="1"/>
+          </p:nvPr>
+        </p:nvSpPr>
+        <p:spPr/>
+        <p:txBody>
+          <a:bodyPr/>
+          <a:lstStyle/>
+          <a:p>
+            <a:r>
+              <a:rPr lang="en-US" dirty="0"/>
+              <a:t/>
+            </a:r>
+            <a:endParaRPr lang="en-US" dirty="0"/>
+          </a:p>
+        </p:txBody>
+      </p:sp>
+      <p:sp>
+        <p:nvSpPr>
+          <p:cNvPr id="4" name="Slide Number Placeholder 3"/>
+          <p:cNvSpPr>
+            <a:spLocks noGrp="1"/>
+          </p:cNvSpPr>
+          <p:nvPr>
+            <p:ph type="sldNum" sz="quarter" idx="10"/>
+          </p:nvPr>
+        </p:nvSpPr>
+        <p:spPr/>
+        <p:txBody>
+          <a:bodyPr/>
+          <a:lstStyle/>
+          <a:p>
+            <a:fld id="{F7021451-1387-4CA6-816F-3879F97B5CBC}" type="slidenum">
+              <a:rPr lang="en-US"/>
+              <a:t>16</a:t>
+            </a:fld>
+            <a:endParaRPr lang="en-US"/>
+          </a:p>
+        </p:txBody>
+      </p:sp>
+    </p:spTree>
+    <p:extLst>
+      <p:ext uri="{BB962C8B-B14F-4D97-AF65-F5344CB8AC3E}">
+        <p14:creationId xmlns:p14="http://schemas.microsoft.com/office/powerpoint/2010/main" val="1024086991"/>
+      </p:ext>
+    </p:extLst>
+  </p:cSld>
+  <p:clrMapOvr>
+    <a:masterClrMapping/>
+  </p:clrMapOvr>
+</p:notes>
+</file>
+
+<file path=ppt/notesSlides/notesSlide17.xml><?xml version="1.0" encoding="utf-8"?>
+<p:notes xmlns:a="http://schemas.openxmlformats.org/drawingml/2006/main" xmlns:r="http://schemas.openxmlformats.org/officeDocument/2006/relationships" xmlns:p="http://schemas.openxmlformats.org/presentationml/2006/main">
+  <p:cSld>
+    <p:spTree>
+      <p:nvGrpSpPr>
+        <p:cNvPr id="1" name=""/>
+        <p:cNvGrpSpPr/>
+        <p:nvPr/>
+      </p:nvGrpSpPr>
+      <p:grpSpPr>
+        <a:xfrm>
+          <a:off x="0" y="0"/>
+          <a:ext cx="0" cy="0"/>
+          <a:chOff x="0" y="0"/>
+          <a:chExt cx="0" cy="0"/>
+        </a:xfrm>
+      </p:grpSpPr>
+      <p:sp>
+        <p:nvSpPr>
+          <p:cNvPr id="2" name="Slide Image Placeholder 1"/>
+          <p:cNvSpPr>
+            <a:spLocks noGrp="1" noRot="1" noChangeAspect="1"/>
+          </p:cNvSpPr>
+          <p:nvPr>
+            <p:ph type="sldImg"/>
+          </p:nvPr>
+        </p:nvSpPr>
+        <p:spPr/>
+      </p:sp>
+      <p:sp>
+        <p:nvSpPr>
+          <p:cNvPr id="3" name="Notes Placeholder 2"/>
+          <p:cNvSpPr>
+            <a:spLocks noGrp="1"/>
+          </p:cNvSpPr>
+          <p:nvPr>
+            <p:ph type="body" idx="1"/>
+          </p:nvPr>
+        </p:nvSpPr>
+        <p:spPr/>
+        <p:txBody>
+          <a:bodyPr/>
+          <a:lstStyle/>
+          <a:p>
+            <a:r>
+              <a:rPr lang="en-US" dirty="0"/>
+              <a:t/>
+            </a:r>
+            <a:endParaRPr lang="en-US" dirty="0"/>
+          </a:p>
+        </p:txBody>
+      </p:sp>
+      <p:sp>
+        <p:nvSpPr>
+          <p:cNvPr id="4" name="Slide Number Placeholder 3"/>
+          <p:cNvSpPr>
+            <a:spLocks noGrp="1"/>
+          </p:cNvSpPr>
+          <p:nvPr>
+            <p:ph type="sldNum" sz="quarter" idx="10"/>
+          </p:nvPr>
+        </p:nvSpPr>
+        <p:spPr/>
+        <p:txBody>
+          <a:bodyPr/>
+          <a:lstStyle/>
+          <a:p>
+            <a:fld id="{F7021451-1387-4CA6-816F-3879F97B5CBC}" type="slidenum">
+              <a:rPr lang="en-US"/>
+              <a:t>17</a:t>
             </a:fld>
             <a:endParaRPr lang="en-US"/>
           </a:p>
@@ -5301,6 +5479,3026 @@
                   <a:schemeClr val="tx1"/>
                 </a:solidFill>
               </a:rPr>
+              <a:t>ユーザー指摘による訂正一覧（1/2）</a:t>
+            </a:r>
+            <a:endParaRPr lang="en-US" sz="3200" dirty="0"/>
+          </a:p>
+        </p:txBody>
+      </p:sp>
+      <p:graphicFrame>
+        <p:nvGraphicFramePr>
+          <p:cNvPr id="15" name="corrections-table-1"/>
+          <p:cNvGraphicFramePr>
+            <a:graphicFrameLocks noGrp="1"/>
+          </p:cNvGraphicFramePr>
+          <p:nvPr>
+            <p:extLst>
+              <p:ext uri="{D42A27DB-BD31-4B8C-83A1-F6EECF244321}">
+                <p14:modId xmlns:p14="http://schemas.microsoft.com/office/powerpoint/2010/main" val="1579011935"/>
+              </p:ext>
+            </p:extLst>
+          </p:nvPr>
+        </p:nvGraphicFramePr>
+        <p:xfrm>
+          <a:off x="548640" y="1280160"/>
+          <a:ext cx="11064240" cy="914400"/>
+        </p:xfrm>
+        <a:graphic>
+          <a:graphicData uri="http://schemas.openxmlformats.org/drawingml/2006/table">
+            <a:tbl>
+              <a:tblPr/>
+              <a:tblGrid>
+                <a:gridCol w="457200"/>
+                <a:gridCol w="3200400"/>
+                <a:gridCol w="3108960"/>
+                <a:gridCol w="4297680"/>
+              </a:tblGrid>
+              <a:tr h="457200">
+                <a:tc>
+                  <a:txBody>
+                    <a:bodyPr/>
+                    <a:lstStyle/>
+                    <a:p>
+                      <a:pPr algn="ctr" indent="0" marL="0">
+                        <a:buNone/>
+                      </a:pPr>
+                      <a:r>
+                        <a:rPr lang="en-US" sz="1400" b="1" dirty="0">
+                          <a:solidFill>
+                            <a:srgbClr val="FFFFFF"/>
+                          </a:solidFill>
+                          <a:latin typeface="Yu Gothic" pitchFamily="34" charset="0"/>
+                          <a:ea typeface="Yu Gothic" pitchFamily="34" charset="-122"/>
+                          <a:cs typeface="Yu Gothic" pitchFamily="34" charset="-120"/>
+                        </a:rPr>
+                        <a:t>#</a:t>
+                      </a:r>
+                      <a:endParaRPr lang="en-US" sz="1400" dirty="0">
+                        <a:latin typeface="Yu Gothic" charset="0"/>
+                        <a:ea typeface="Yu Gothic" charset="0"/>
+                        <a:cs typeface="Yu Gothic" charset="0"/>
+                      </a:endParaRPr>
+                    </a:p>
+                  </a:txBody>
+                  <a:tcPr marL="91440" marR="91440" marT="36576" marB="36576" anchor="ctr">
+                    <a:lnL w="9525" cap="flat" cmpd="sng" algn="ctr">
+                      <a:solidFill>
+                        <a:srgbClr val="D5DCE6"/>
+                      </a:solidFill>
+                      <a:prstDash val="solid"/>
+                      <a:round/>
+                      <a:headEnd type="none" w="med" len="med"/>
+                      <a:tailEnd type="none" w="med" len="med"/>
+                    </a:lnL>
+                    <a:lnR w="9525" cap="flat" cmpd="sng" algn="ctr">
+                      <a:solidFill>
+                        <a:srgbClr val="D5DCE6"/>
+                      </a:solidFill>
+                      <a:prstDash val="solid"/>
+                      <a:round/>
+                      <a:headEnd type="none" w="med" len="med"/>
+                      <a:tailEnd type="none" w="med" len="med"/>
+                    </a:lnR>
+                    <a:lnT w="9525" cap="flat" cmpd="sng" algn="ctr">
+                      <a:solidFill>
+                        <a:srgbClr val="D5DCE6"/>
+                      </a:solidFill>
+                      <a:prstDash val="solid"/>
+                      <a:round/>
+                      <a:headEnd type="none" w="med" len="med"/>
+                      <a:tailEnd type="none" w="med" len="med"/>
+                    </a:lnT>
+                    <a:lnB w="9525" cap="flat" cmpd="sng" algn="ctr">
+                      <a:solidFill>
+                        <a:srgbClr val="D5DCE6"/>
+                      </a:solidFill>
+                      <a:prstDash val="solid"/>
+                      <a:round/>
+                      <a:headEnd type="none" w="med" len="med"/>
+                      <a:tailEnd type="none" w="med" len="med"/>
+                    </a:lnB>
+                    <a:solidFill>
+                      <a:srgbClr val="1B2A41"/>
+                    </a:solidFill>
+                  </a:tcPr>
+                </a:tc>
+                <a:tc>
+                  <a:txBody>
+                    <a:bodyPr/>
+                    <a:lstStyle/>
+                    <a:p>
+                      <a:pPr algn="ctr" indent="0" marL="0">
+                        <a:buNone/>
+                      </a:pPr>
+                      <a:r>
+                        <a:rPr lang="en-US" sz="1400" b="1" dirty="0">
+                          <a:solidFill>
+                            <a:srgbClr val="FFFFFF"/>
+                          </a:solidFill>
+                          <a:latin typeface="Yu Gothic" pitchFamily="34" charset="0"/>
+                          <a:ea typeface="Yu Gothic" pitchFamily="34" charset="-122"/>
+                          <a:cs typeface="Yu Gothic" pitchFamily="34" charset="-120"/>
+                        </a:rPr>
+                        <a:t>ユーザーの指摘・質問</a:t>
+                      </a:r>
+                      <a:endParaRPr lang="en-US" sz="1400" dirty="0">
+                        <a:latin typeface="Yu Gothic" charset="0"/>
+                        <a:ea typeface="Yu Gothic" charset="0"/>
+                        <a:cs typeface="Yu Gothic" charset="0"/>
+                      </a:endParaRPr>
+                    </a:p>
+                  </a:txBody>
+                  <a:tcPr marL="91440" marR="91440" marT="36576" marB="36576" anchor="ctr">
+                    <a:lnL w="9525" cap="flat" cmpd="sng" algn="ctr">
+                      <a:solidFill>
+                        <a:srgbClr val="D5DCE6"/>
+                      </a:solidFill>
+                      <a:prstDash val="solid"/>
+                      <a:round/>
+                      <a:headEnd type="none" w="med" len="med"/>
+                      <a:tailEnd type="none" w="med" len="med"/>
+                    </a:lnL>
+                    <a:lnR w="9525" cap="flat" cmpd="sng" algn="ctr">
+                      <a:solidFill>
+                        <a:srgbClr val="D5DCE6"/>
+                      </a:solidFill>
+                      <a:prstDash val="solid"/>
+                      <a:round/>
+                      <a:headEnd type="none" w="med" len="med"/>
+                      <a:tailEnd type="none" w="med" len="med"/>
+                    </a:lnR>
+                    <a:lnT w="9525" cap="flat" cmpd="sng" algn="ctr">
+                      <a:solidFill>
+                        <a:srgbClr val="D5DCE6"/>
+                      </a:solidFill>
+                      <a:prstDash val="solid"/>
+                      <a:round/>
+                      <a:headEnd type="none" w="med" len="med"/>
+                      <a:tailEnd type="none" w="med" len="med"/>
+                    </a:lnT>
+                    <a:lnB w="9525" cap="flat" cmpd="sng" algn="ctr">
+                      <a:solidFill>
+                        <a:srgbClr val="D5DCE6"/>
+                      </a:solidFill>
+                      <a:prstDash val="solid"/>
+                      <a:round/>
+                      <a:headEnd type="none" w="med" len="med"/>
+                      <a:tailEnd type="none" w="med" len="med"/>
+                    </a:lnB>
+                    <a:solidFill>
+                      <a:srgbClr val="1B2A41"/>
+                    </a:solidFill>
+                  </a:tcPr>
+                </a:tc>
+                <a:tc>
+                  <a:txBody>
+                    <a:bodyPr/>
+                    <a:lstStyle/>
+                    <a:p>
+                      <a:pPr algn="ctr" indent="0" marL="0">
+                        <a:buNone/>
+                      </a:pPr>
+                      <a:r>
+                        <a:rPr lang="en-US" sz="1400" b="1" dirty="0">
+                          <a:solidFill>
+                            <a:srgbClr val="FFFFFF"/>
+                          </a:solidFill>
+                          <a:latin typeface="Yu Gothic" pitchFamily="34" charset="0"/>
+                          <a:ea typeface="Yu Gothic" pitchFamily="34" charset="-122"/>
+                          <a:cs typeface="Yu Gothic" pitchFamily="34" charset="-120"/>
+                        </a:rPr>
+                        <a:t>当初の問題点</a:t>
+                      </a:r>
+                      <a:endParaRPr lang="en-US" sz="1400" dirty="0">
+                        <a:latin typeface="Yu Gothic" charset="0"/>
+                        <a:ea typeface="Yu Gothic" charset="0"/>
+                        <a:cs typeface="Yu Gothic" charset="0"/>
+                      </a:endParaRPr>
+                    </a:p>
+                  </a:txBody>
+                  <a:tcPr marL="91440" marR="91440" marT="36576" marB="36576" anchor="ctr">
+                    <a:lnL w="9525" cap="flat" cmpd="sng" algn="ctr">
+                      <a:solidFill>
+                        <a:srgbClr val="D5DCE6"/>
+                      </a:solidFill>
+                      <a:prstDash val="solid"/>
+                      <a:round/>
+                      <a:headEnd type="none" w="med" len="med"/>
+                      <a:tailEnd type="none" w="med" len="med"/>
+                    </a:lnL>
+                    <a:lnR w="9525" cap="flat" cmpd="sng" algn="ctr">
+                      <a:solidFill>
+                        <a:srgbClr val="D5DCE6"/>
+                      </a:solidFill>
+                      <a:prstDash val="solid"/>
+                      <a:round/>
+                      <a:headEnd type="none" w="med" len="med"/>
+                      <a:tailEnd type="none" w="med" len="med"/>
+                    </a:lnR>
+                    <a:lnT w="9525" cap="flat" cmpd="sng" algn="ctr">
+                      <a:solidFill>
+                        <a:srgbClr val="D5DCE6"/>
+                      </a:solidFill>
+                      <a:prstDash val="solid"/>
+                      <a:round/>
+                      <a:headEnd type="none" w="med" len="med"/>
+                      <a:tailEnd type="none" w="med" len="med"/>
+                    </a:lnT>
+                    <a:lnB w="9525" cap="flat" cmpd="sng" algn="ctr">
+                      <a:solidFill>
+                        <a:srgbClr val="D5DCE6"/>
+                      </a:solidFill>
+                      <a:prstDash val="solid"/>
+                      <a:round/>
+                      <a:headEnd type="none" w="med" len="med"/>
+                      <a:tailEnd type="none" w="med" len="med"/>
+                    </a:lnB>
+                    <a:solidFill>
+                      <a:srgbClr val="1B2A41"/>
+                    </a:solidFill>
+                  </a:tcPr>
+                </a:tc>
+                <a:tc>
+                  <a:txBody>
+                    <a:bodyPr/>
+                    <a:lstStyle/>
+                    <a:p>
+                      <a:pPr algn="ctr" indent="0" marL="0">
+                        <a:buNone/>
+                      </a:pPr>
+                      <a:r>
+                        <a:rPr lang="en-US" sz="1400" b="1" dirty="0">
+                          <a:solidFill>
+                            <a:srgbClr val="FFFFFF"/>
+                          </a:solidFill>
+                          <a:latin typeface="Yu Gothic" pitchFamily="34" charset="0"/>
+                          <a:ea typeface="Yu Gothic" pitchFamily="34" charset="-122"/>
+                          <a:cs typeface="Yu Gothic" pitchFamily="34" charset="-120"/>
+                        </a:rPr>
+                        <a:t>調査・結果</a:t>
+                      </a:r>
+                      <a:endParaRPr lang="en-US" sz="1400" dirty="0">
+                        <a:latin typeface="Yu Gothic" charset="0"/>
+                        <a:ea typeface="Yu Gothic" charset="0"/>
+                        <a:cs typeface="Yu Gothic" charset="0"/>
+                      </a:endParaRPr>
+                    </a:p>
+                  </a:txBody>
+                  <a:tcPr marL="91440" marR="91440" marT="36576" marB="36576" anchor="ctr">
+                    <a:lnL w="9525" cap="flat" cmpd="sng" algn="ctr">
+                      <a:solidFill>
+                        <a:srgbClr val="D5DCE6"/>
+                      </a:solidFill>
+                      <a:prstDash val="solid"/>
+                      <a:round/>
+                      <a:headEnd type="none" w="med" len="med"/>
+                      <a:tailEnd type="none" w="med" len="med"/>
+                    </a:lnL>
+                    <a:lnR w="9525" cap="flat" cmpd="sng" algn="ctr">
+                      <a:solidFill>
+                        <a:srgbClr val="D5DCE6"/>
+                      </a:solidFill>
+                      <a:prstDash val="solid"/>
+                      <a:round/>
+                      <a:headEnd type="none" w="med" len="med"/>
+                      <a:tailEnd type="none" w="med" len="med"/>
+                    </a:lnR>
+                    <a:lnT w="9525" cap="flat" cmpd="sng" algn="ctr">
+                      <a:solidFill>
+                        <a:srgbClr val="D5DCE6"/>
+                      </a:solidFill>
+                      <a:prstDash val="solid"/>
+                      <a:round/>
+                      <a:headEnd type="none" w="med" len="med"/>
+                      <a:tailEnd type="none" w="med" len="med"/>
+                    </a:lnT>
+                    <a:lnB w="9525" cap="flat" cmpd="sng" algn="ctr">
+                      <a:solidFill>
+                        <a:srgbClr val="D5DCE6"/>
+                      </a:solidFill>
+                      <a:prstDash val="solid"/>
+                      <a:round/>
+                      <a:headEnd type="none" w="med" len="med"/>
+                      <a:tailEnd type="none" w="med" len="med"/>
+                    </a:lnB>
+                    <a:solidFill>
+                      <a:srgbClr val="1B2A41"/>
+                    </a:solidFill>
+                  </a:tcPr>
+                </a:tc>
+              </a:tr>
+              <a:tr h="1051560">
+                <a:tc>
+                  <a:txBody>
+                    <a:bodyPr/>
+                    <a:lstStyle/>
+                    <a:p>
+                      <a:pPr algn="l" indent="0" marL="0">
+                        <a:buNone/>
+                      </a:pPr>
+                      <a:r>
+                        <a:rPr lang="en-US" sz="1400" dirty="0">
+                          <a:solidFill>
+                            <a:srgbClr val="1B2A41"/>
+                          </a:solidFill>
+                          <a:latin typeface="Yu Gothic" pitchFamily="34" charset="0"/>
+                          <a:ea typeface="Yu Gothic" pitchFamily="34" charset="-122"/>
+                          <a:cs typeface="Yu Gothic" pitchFamily="34" charset="-120"/>
+                        </a:rPr>
+                        <a:t>1</a:t>
+                      </a:r>
+                      <a:endParaRPr lang="en-US" sz="1400" dirty="0">
+                        <a:latin typeface="Yu Gothic" charset="0"/>
+                        <a:ea typeface="Yu Gothic" charset="0"/>
+                        <a:cs typeface="Yu Gothic" charset="0"/>
+                      </a:endParaRPr>
+                    </a:p>
+                  </a:txBody>
+                  <a:tcPr marL="91440" marR="91440" marT="36576" marB="36576" anchor="ctr">
+                    <a:lnL w="9525" cap="flat" cmpd="sng" algn="ctr">
+                      <a:solidFill>
+                        <a:srgbClr val="D5DCE6"/>
+                      </a:solidFill>
+                      <a:prstDash val="solid"/>
+                      <a:round/>
+                      <a:headEnd type="none" w="med" len="med"/>
+                      <a:tailEnd type="none" w="med" len="med"/>
+                    </a:lnL>
+                    <a:lnR w="9525" cap="flat" cmpd="sng" algn="ctr">
+                      <a:solidFill>
+                        <a:srgbClr val="D5DCE6"/>
+                      </a:solidFill>
+                      <a:prstDash val="solid"/>
+                      <a:round/>
+                      <a:headEnd type="none" w="med" len="med"/>
+                      <a:tailEnd type="none" w="med" len="med"/>
+                    </a:lnR>
+                    <a:lnT w="9525" cap="flat" cmpd="sng" algn="ctr">
+                      <a:solidFill>
+                        <a:srgbClr val="D5DCE6"/>
+                      </a:solidFill>
+                      <a:prstDash val="solid"/>
+                      <a:round/>
+                      <a:headEnd type="none" w="med" len="med"/>
+                      <a:tailEnd type="none" w="med" len="med"/>
+                    </a:lnT>
+                    <a:lnB w="9525" cap="flat" cmpd="sng" algn="ctr">
+                      <a:solidFill>
+                        <a:srgbClr val="D5DCE6"/>
+                      </a:solidFill>
+                      <a:prstDash val="solid"/>
+                      <a:round/>
+                      <a:headEnd type="none" w="med" len="med"/>
+                      <a:tailEnd type="none" w="med" len="med"/>
+                    </a:lnB>
+                    <a:solidFill>
+                      <a:srgbClr val="FFFFFF"/>
+                    </a:solidFill>
+                  </a:tcPr>
+                </a:tc>
+                <a:tc>
+                  <a:txBody>
+                    <a:bodyPr/>
+                    <a:lstStyle/>
+                    <a:p>
+                      <a:pPr algn="l" indent="0" marL="0">
+                        <a:buNone/>
+                      </a:pPr>
+                      <a:r>
+                        <a:rPr lang="en-US" sz="1400" dirty="0">
+                          <a:solidFill>
+                            <a:srgbClr val="1B2A41"/>
+                          </a:solidFill>
+                          <a:latin typeface="Yu Gothic" pitchFamily="34" charset="0"/>
+                          <a:ea typeface="Yu Gothic" pitchFamily="34" charset="-122"/>
+                          <a:cs typeface="Yu Gothic" pitchFamily="34" charset="-120"/>
+                        </a:rPr>
+                        <a:t>「日照時間より全天日射量の方が発電量との相関が良いが、日射量でも調べた？」</a:t>
+                      </a:r>
+                      <a:endParaRPr lang="en-US" sz="1400" dirty="0">
+                        <a:latin typeface="Yu Gothic" charset="0"/>
+                        <a:ea typeface="Yu Gothic" charset="0"/>
+                        <a:cs typeface="Yu Gothic" charset="0"/>
+                      </a:endParaRPr>
+                    </a:p>
+                  </a:txBody>
+                  <a:tcPr marL="91440" marR="91440" marT="36576" marB="36576" anchor="ctr">
+                    <a:lnL w="9525" cap="flat" cmpd="sng" algn="ctr">
+                      <a:solidFill>
+                        <a:srgbClr val="D5DCE6"/>
+                      </a:solidFill>
+                      <a:prstDash val="solid"/>
+                      <a:round/>
+                      <a:headEnd type="none" w="med" len="med"/>
+                      <a:tailEnd type="none" w="med" len="med"/>
+                    </a:lnL>
+                    <a:lnR w="9525" cap="flat" cmpd="sng" algn="ctr">
+                      <a:solidFill>
+                        <a:srgbClr val="D5DCE6"/>
+                      </a:solidFill>
+                      <a:prstDash val="solid"/>
+                      <a:round/>
+                      <a:headEnd type="none" w="med" len="med"/>
+                      <a:tailEnd type="none" w="med" len="med"/>
+                    </a:lnR>
+                    <a:lnT w="9525" cap="flat" cmpd="sng" algn="ctr">
+                      <a:solidFill>
+                        <a:srgbClr val="D5DCE6"/>
+                      </a:solidFill>
+                      <a:prstDash val="solid"/>
+                      <a:round/>
+                      <a:headEnd type="none" w="med" len="med"/>
+                      <a:tailEnd type="none" w="med" len="med"/>
+                    </a:lnT>
+                    <a:lnB w="9525" cap="flat" cmpd="sng" algn="ctr">
+                      <a:solidFill>
+                        <a:srgbClr val="D5DCE6"/>
+                      </a:solidFill>
+                      <a:prstDash val="solid"/>
+                      <a:round/>
+                      <a:headEnd type="none" w="med" len="med"/>
+                      <a:tailEnd type="none" w="med" len="med"/>
+                    </a:lnB>
+                    <a:solidFill>
+                      <a:srgbClr val="FFFFFF"/>
+                    </a:solidFill>
+                  </a:tcPr>
+                </a:tc>
+                <a:tc>
+                  <a:txBody>
+                    <a:bodyPr/>
+                    <a:lstStyle/>
+                    <a:p>
+                      <a:pPr algn="l" indent="0" marL="0">
+                        <a:buNone/>
+                      </a:pPr>
+                      <a:r>
+                        <a:rPr lang="en-US" sz="1400" dirty="0">
+                          <a:solidFill>
+                            <a:srgbClr val="1B2A41"/>
+                          </a:solidFill>
+                          <a:latin typeface="Yu Gothic" pitchFamily="34" charset="0"/>
+                          <a:ea typeface="Yu Gothic" pitchFamily="34" charset="-122"/>
+                          <a:cs typeface="Yu Gothic" pitchFamily="34" charset="-120"/>
+                        </a:rPr>
+                        <a:t>出力制御の判別力（二値）しか見ておらず、全天日射量を試していなかった</a:t>
+                      </a:r>
+                      <a:endParaRPr lang="en-US" sz="1400" dirty="0">
+                        <a:latin typeface="Yu Gothic" charset="0"/>
+                        <a:ea typeface="Yu Gothic" charset="0"/>
+                        <a:cs typeface="Yu Gothic" charset="0"/>
+                      </a:endParaRPr>
+                    </a:p>
+                  </a:txBody>
+                  <a:tcPr marL="91440" marR="91440" marT="36576" marB="36576" anchor="ctr">
+                    <a:lnL w="9525" cap="flat" cmpd="sng" algn="ctr">
+                      <a:solidFill>
+                        <a:srgbClr val="D5DCE6"/>
+                      </a:solidFill>
+                      <a:prstDash val="solid"/>
+                      <a:round/>
+                      <a:headEnd type="none" w="med" len="med"/>
+                      <a:tailEnd type="none" w="med" len="med"/>
+                    </a:lnL>
+                    <a:lnR w="9525" cap="flat" cmpd="sng" algn="ctr">
+                      <a:solidFill>
+                        <a:srgbClr val="D5DCE6"/>
+                      </a:solidFill>
+                      <a:prstDash val="solid"/>
+                      <a:round/>
+                      <a:headEnd type="none" w="med" len="med"/>
+                      <a:tailEnd type="none" w="med" len="med"/>
+                    </a:lnR>
+                    <a:lnT w="9525" cap="flat" cmpd="sng" algn="ctr">
+                      <a:solidFill>
+                        <a:srgbClr val="D5DCE6"/>
+                      </a:solidFill>
+                      <a:prstDash val="solid"/>
+                      <a:round/>
+                      <a:headEnd type="none" w="med" len="med"/>
+                      <a:tailEnd type="none" w="med" len="med"/>
+                    </a:lnT>
+                    <a:lnB w="9525" cap="flat" cmpd="sng" algn="ctr">
+                      <a:solidFill>
+                        <a:srgbClr val="D5DCE6"/>
+                      </a:solidFill>
+                      <a:prstDash val="solid"/>
+                      <a:round/>
+                      <a:headEnd type="none" w="med" len="med"/>
+                      <a:tailEnd type="none" w="med" len="med"/>
+                    </a:lnB>
+                    <a:solidFill>
+                      <a:srgbClr val="FFFFFF"/>
+                    </a:solidFill>
+                  </a:tcPr>
+                </a:tc>
+                <a:tc>
+                  <a:txBody>
+                    <a:bodyPr/>
+                    <a:lstStyle/>
+                    <a:p>
+                      <a:pPr algn="l" indent="0" marL="0">
+                        <a:buNone/>
+                      </a:pPr>
+                      <a:r>
+                        <a:rPr lang="en-US" sz="1400" dirty="0">
+                          <a:solidFill>
+                            <a:srgbClr val="1B2A41"/>
+                          </a:solidFill>
+                          <a:latin typeface="Yu Gothic" pitchFamily="34" charset="0"/>
+                          <a:ea typeface="Yu Gothic" pitchFamily="34" charset="-122"/>
+                          <a:cs typeface="Yu Gothic" pitchFamily="34" charset="-120"/>
+                        </a:rPr>
+                        <a:t>制御の判別には日照時間の方が強い（逆の結果）。後に発電量（連続量）では日射量が強いと判明＝目的変数で最適指標が違う</a:t>
+                      </a:r>
+                      <a:endParaRPr lang="en-US" sz="1400" dirty="0">
+                        <a:latin typeface="Yu Gothic" charset="0"/>
+                        <a:ea typeface="Yu Gothic" charset="0"/>
+                        <a:cs typeface="Yu Gothic" charset="0"/>
+                      </a:endParaRPr>
+                    </a:p>
+                  </a:txBody>
+                  <a:tcPr marL="91440" marR="91440" marT="36576" marB="36576" anchor="ctr">
+                    <a:lnL w="9525" cap="flat" cmpd="sng" algn="ctr">
+                      <a:solidFill>
+                        <a:srgbClr val="D5DCE6"/>
+                      </a:solidFill>
+                      <a:prstDash val="solid"/>
+                      <a:round/>
+                      <a:headEnd type="none" w="med" len="med"/>
+                      <a:tailEnd type="none" w="med" len="med"/>
+                    </a:lnL>
+                    <a:lnR w="9525" cap="flat" cmpd="sng" algn="ctr">
+                      <a:solidFill>
+                        <a:srgbClr val="D5DCE6"/>
+                      </a:solidFill>
+                      <a:prstDash val="solid"/>
+                      <a:round/>
+                      <a:headEnd type="none" w="med" len="med"/>
+                      <a:tailEnd type="none" w="med" len="med"/>
+                    </a:lnR>
+                    <a:lnT w="9525" cap="flat" cmpd="sng" algn="ctr">
+                      <a:solidFill>
+                        <a:srgbClr val="D5DCE6"/>
+                      </a:solidFill>
+                      <a:prstDash val="solid"/>
+                      <a:round/>
+                      <a:headEnd type="none" w="med" len="med"/>
+                      <a:tailEnd type="none" w="med" len="med"/>
+                    </a:lnT>
+                    <a:lnB w="9525" cap="flat" cmpd="sng" algn="ctr">
+                      <a:solidFill>
+                        <a:srgbClr val="D5DCE6"/>
+                      </a:solidFill>
+                      <a:prstDash val="solid"/>
+                      <a:round/>
+                      <a:headEnd type="none" w="med" len="med"/>
+                      <a:tailEnd type="none" w="med" len="med"/>
+                    </a:lnB>
+                    <a:solidFill>
+                      <a:srgbClr val="FFFFFF"/>
+                    </a:solidFill>
+                  </a:tcPr>
+                </a:tc>
+              </a:tr>
+              <a:tr h="1051560">
+                <a:tc>
+                  <a:txBody>
+                    <a:bodyPr/>
+                    <a:lstStyle/>
+                    <a:p>
+                      <a:pPr algn="l" indent="0" marL="0">
+                        <a:buNone/>
+                      </a:pPr>
+                      <a:r>
+                        <a:rPr lang="en-US" sz="1400" dirty="0">
+                          <a:solidFill>
+                            <a:srgbClr val="1B2A41"/>
+                          </a:solidFill>
+                          <a:latin typeface="Yu Gothic" pitchFamily="34" charset="0"/>
+                          <a:ea typeface="Yu Gothic" pitchFamily="34" charset="-122"/>
+                          <a:cs typeface="Yu Gothic" pitchFamily="34" charset="-120"/>
+                        </a:rPr>
+                        <a:t>2</a:t>
+                      </a:r>
+                      <a:endParaRPr lang="en-US" sz="1400" dirty="0">
+                        <a:latin typeface="Yu Gothic" charset="0"/>
+                        <a:ea typeface="Yu Gothic" charset="0"/>
+                        <a:cs typeface="Yu Gothic" charset="0"/>
+                      </a:endParaRPr>
+                    </a:p>
+                  </a:txBody>
+                  <a:tcPr marL="91440" marR="91440" marT="36576" marB="36576" anchor="ctr">
+                    <a:lnL w="9525" cap="flat" cmpd="sng" algn="ctr">
+                      <a:solidFill>
+                        <a:srgbClr val="D5DCE6"/>
+                      </a:solidFill>
+                      <a:prstDash val="solid"/>
+                      <a:round/>
+                      <a:headEnd type="none" w="med" len="med"/>
+                      <a:tailEnd type="none" w="med" len="med"/>
+                    </a:lnL>
+                    <a:lnR w="9525" cap="flat" cmpd="sng" algn="ctr">
+                      <a:solidFill>
+                        <a:srgbClr val="D5DCE6"/>
+                      </a:solidFill>
+                      <a:prstDash val="solid"/>
+                      <a:round/>
+                      <a:headEnd type="none" w="med" len="med"/>
+                      <a:tailEnd type="none" w="med" len="med"/>
+                    </a:lnR>
+                    <a:lnT w="9525" cap="flat" cmpd="sng" algn="ctr">
+                      <a:solidFill>
+                        <a:srgbClr val="D5DCE6"/>
+                      </a:solidFill>
+                      <a:prstDash val="solid"/>
+                      <a:round/>
+                      <a:headEnd type="none" w="med" len="med"/>
+                      <a:tailEnd type="none" w="med" len="med"/>
+                    </a:lnT>
+                    <a:lnB w="9525" cap="flat" cmpd="sng" algn="ctr">
+                      <a:solidFill>
+                        <a:srgbClr val="D5DCE6"/>
+                      </a:solidFill>
+                      <a:prstDash val="solid"/>
+                      <a:round/>
+                      <a:headEnd type="none" w="med" len="med"/>
+                      <a:tailEnd type="none" w="med" len="med"/>
+                    </a:lnB>
+                    <a:solidFill>
+                      <a:srgbClr val="F1F4F8"/>
+                    </a:solidFill>
+                  </a:tcPr>
+                </a:tc>
+                <a:tc>
+                  <a:txBody>
+                    <a:bodyPr/>
+                    <a:lstStyle/>
+                    <a:p>
+                      <a:pPr algn="l" indent="0" marL="0">
+                        <a:buNone/>
+                      </a:pPr>
+                      <a:r>
+                        <a:rPr lang="en-US" sz="1400" dirty="0">
+                          <a:solidFill>
+                            <a:srgbClr val="1B2A41"/>
+                          </a:solidFill>
+                          <a:latin typeface="Yu Gothic" pitchFamily="34" charset="0"/>
+                          <a:ea typeface="Yu Gothic" pitchFamily="34" charset="-122"/>
+                          <a:cs typeface="Yu Gothic" pitchFamily="34" charset="-120"/>
+                        </a:rPr>
+                        <a:t>「AMGSDSの日照予報は快晴時に過少。気象庁予報より精度が良いかは不明。過去の制御データで検証できるか？」</a:t>
+                      </a:r>
+                      <a:endParaRPr lang="en-US" sz="1400" dirty="0">
+                        <a:latin typeface="Yu Gothic" charset="0"/>
+                        <a:ea typeface="Yu Gothic" charset="0"/>
+                        <a:cs typeface="Yu Gothic" charset="0"/>
+                      </a:endParaRPr>
+                    </a:p>
+                  </a:txBody>
+                  <a:tcPr marL="91440" marR="91440" marT="36576" marB="36576" anchor="ctr">
+                    <a:lnL w="9525" cap="flat" cmpd="sng" algn="ctr">
+                      <a:solidFill>
+                        <a:srgbClr val="D5DCE6"/>
+                      </a:solidFill>
+                      <a:prstDash val="solid"/>
+                      <a:round/>
+                      <a:headEnd type="none" w="med" len="med"/>
+                      <a:tailEnd type="none" w="med" len="med"/>
+                    </a:lnL>
+                    <a:lnR w="9525" cap="flat" cmpd="sng" algn="ctr">
+                      <a:solidFill>
+                        <a:srgbClr val="D5DCE6"/>
+                      </a:solidFill>
+                      <a:prstDash val="solid"/>
+                      <a:round/>
+                      <a:headEnd type="none" w="med" len="med"/>
+                      <a:tailEnd type="none" w="med" len="med"/>
+                    </a:lnR>
+                    <a:lnT w="9525" cap="flat" cmpd="sng" algn="ctr">
+                      <a:solidFill>
+                        <a:srgbClr val="D5DCE6"/>
+                      </a:solidFill>
+                      <a:prstDash val="solid"/>
+                      <a:round/>
+                      <a:headEnd type="none" w="med" len="med"/>
+                      <a:tailEnd type="none" w="med" len="med"/>
+                    </a:lnT>
+                    <a:lnB w="9525" cap="flat" cmpd="sng" algn="ctr">
+                      <a:solidFill>
+                        <a:srgbClr val="D5DCE6"/>
+                      </a:solidFill>
+                      <a:prstDash val="solid"/>
+                      <a:round/>
+                      <a:headEnd type="none" w="med" len="med"/>
+                      <a:tailEnd type="none" w="med" len="med"/>
+                    </a:lnB>
+                    <a:solidFill>
+                      <a:srgbClr val="F1F4F8"/>
+                    </a:solidFill>
+                  </a:tcPr>
+                </a:tc>
+                <a:tc>
+                  <a:txBody>
+                    <a:bodyPr/>
+                    <a:lstStyle/>
+                    <a:p>
+                      <a:pPr algn="l" indent="0" marL="0">
+                        <a:buNone/>
+                      </a:pPr>
+                      <a:r>
+                        <a:rPr lang="en-US" sz="1400" dirty="0">
+                          <a:solidFill>
+                            <a:srgbClr val="1B2A41"/>
+                          </a:solidFill>
+                          <a:latin typeface="Yu Gothic" pitchFamily="34" charset="0"/>
+                          <a:ea typeface="Yu Gothic" pitchFamily="34" charset="-122"/>
+                          <a:cs typeface="Yu Gothic" pitchFamily="34" charset="-120"/>
+                        </a:rPr>
+                        <a:t>「AMGSDSの方が正確」と断定。過去日付の応答が実況（解析値）と気づいていなかった</a:t>
+                      </a:r>
+                      <a:endParaRPr lang="en-US" sz="1400" dirty="0">
+                        <a:latin typeface="Yu Gothic" charset="0"/>
+                        <a:ea typeface="Yu Gothic" charset="0"/>
+                        <a:cs typeface="Yu Gothic" charset="0"/>
+                      </a:endParaRPr>
+                    </a:p>
+                  </a:txBody>
+                  <a:tcPr marL="91440" marR="91440" marT="36576" marB="36576" anchor="ctr">
+                    <a:lnL w="9525" cap="flat" cmpd="sng" algn="ctr">
+                      <a:solidFill>
+                        <a:srgbClr val="D5DCE6"/>
+                      </a:solidFill>
+                      <a:prstDash val="solid"/>
+                      <a:round/>
+                      <a:headEnd type="none" w="med" len="med"/>
+                      <a:tailEnd type="none" w="med" len="med"/>
+                    </a:lnL>
+                    <a:lnR w="9525" cap="flat" cmpd="sng" algn="ctr">
+                      <a:solidFill>
+                        <a:srgbClr val="D5DCE6"/>
+                      </a:solidFill>
+                      <a:prstDash val="solid"/>
+                      <a:round/>
+                      <a:headEnd type="none" w="med" len="med"/>
+                      <a:tailEnd type="none" w="med" len="med"/>
+                    </a:lnR>
+                    <a:lnT w="9525" cap="flat" cmpd="sng" algn="ctr">
+                      <a:solidFill>
+                        <a:srgbClr val="D5DCE6"/>
+                      </a:solidFill>
+                      <a:prstDash val="solid"/>
+                      <a:round/>
+                      <a:headEnd type="none" w="med" len="med"/>
+                      <a:tailEnd type="none" w="med" len="med"/>
+                    </a:lnT>
+                    <a:lnB w="9525" cap="flat" cmpd="sng" algn="ctr">
+                      <a:solidFill>
+                        <a:srgbClr val="D5DCE6"/>
+                      </a:solidFill>
+                      <a:prstDash val="solid"/>
+                      <a:round/>
+                      <a:headEnd type="none" w="med" len="med"/>
+                      <a:tailEnd type="none" w="med" len="med"/>
+                    </a:lnB>
+                    <a:solidFill>
+                      <a:srgbClr val="F1F4F8"/>
+                    </a:solidFill>
+                  </a:tcPr>
+                </a:tc>
+                <a:tc>
+                  <a:txBody>
+                    <a:bodyPr/>
+                    <a:lstStyle/>
+                    <a:p>
+                      <a:pPr algn="l" indent="0" marL="0">
+                        <a:buNone/>
+                      </a:pPr>
+                      <a:r>
+                        <a:rPr lang="en-US" sz="1400" dirty="0">
+                          <a:solidFill>
+                            <a:srgbClr val="1B2A41"/>
+                          </a:solidFill>
+                          <a:latin typeface="Yu Gothic" pitchFamily="34" charset="0"/>
+                          <a:ea typeface="Yu Gothic" pitchFamily="34" charset="-122"/>
+                          <a:cs typeface="Yu Gothic" pitchFamily="34" charset="-120"/>
+                        </a:rPr>
+                        <a:t>検証方法を訂正し予報vintage検証を再確認。快晴日に約-5hの過少評価で、優劣はつけられないと訂正</a:t>
+                      </a:r>
+                      <a:endParaRPr lang="en-US" sz="1400" dirty="0">
+                        <a:latin typeface="Yu Gothic" charset="0"/>
+                        <a:ea typeface="Yu Gothic" charset="0"/>
+                        <a:cs typeface="Yu Gothic" charset="0"/>
+                      </a:endParaRPr>
+                    </a:p>
+                  </a:txBody>
+                  <a:tcPr marL="91440" marR="91440" marT="36576" marB="36576" anchor="ctr">
+                    <a:lnL w="9525" cap="flat" cmpd="sng" algn="ctr">
+                      <a:solidFill>
+                        <a:srgbClr val="D5DCE6"/>
+                      </a:solidFill>
+                      <a:prstDash val="solid"/>
+                      <a:round/>
+                      <a:headEnd type="none" w="med" len="med"/>
+                      <a:tailEnd type="none" w="med" len="med"/>
+                    </a:lnL>
+                    <a:lnR w="9525" cap="flat" cmpd="sng" algn="ctr">
+                      <a:solidFill>
+                        <a:srgbClr val="D5DCE6"/>
+                      </a:solidFill>
+                      <a:prstDash val="solid"/>
+                      <a:round/>
+                      <a:headEnd type="none" w="med" len="med"/>
+                      <a:tailEnd type="none" w="med" len="med"/>
+                    </a:lnR>
+                    <a:lnT w="9525" cap="flat" cmpd="sng" algn="ctr">
+                      <a:solidFill>
+                        <a:srgbClr val="D5DCE6"/>
+                      </a:solidFill>
+                      <a:prstDash val="solid"/>
+                      <a:round/>
+                      <a:headEnd type="none" w="med" len="med"/>
+                      <a:tailEnd type="none" w="med" len="med"/>
+                    </a:lnT>
+                    <a:lnB w="9525" cap="flat" cmpd="sng" algn="ctr">
+                      <a:solidFill>
+                        <a:srgbClr val="D5DCE6"/>
+                      </a:solidFill>
+                      <a:prstDash val="solid"/>
+                      <a:round/>
+                      <a:headEnd type="none" w="med" len="med"/>
+                      <a:tailEnd type="none" w="med" len="med"/>
+                    </a:lnB>
+                    <a:solidFill>
+                      <a:srgbClr val="F1F4F8"/>
+                    </a:solidFill>
+                  </a:tcPr>
+                </a:tc>
+              </a:tr>
+              <a:tr h="1051560">
+                <a:tc>
+                  <a:txBody>
+                    <a:bodyPr/>
+                    <a:lstStyle/>
+                    <a:p>
+                      <a:pPr algn="l" indent="0" marL="0">
+                        <a:buNone/>
+                      </a:pPr>
+                      <a:r>
+                        <a:rPr lang="en-US" sz="1400" dirty="0">
+                          <a:solidFill>
+                            <a:srgbClr val="1B2A41"/>
+                          </a:solidFill>
+                          <a:latin typeface="Yu Gothic" pitchFamily="34" charset="0"/>
+                          <a:ea typeface="Yu Gothic" pitchFamily="34" charset="-122"/>
+                          <a:cs typeface="Yu Gothic" pitchFamily="34" charset="-120"/>
+                        </a:rPr>
+                        <a:t>3</a:t>
+                      </a:r>
+                      <a:endParaRPr lang="en-US" sz="1400" dirty="0">
+                        <a:latin typeface="Yu Gothic" charset="0"/>
+                        <a:ea typeface="Yu Gothic" charset="0"/>
+                        <a:cs typeface="Yu Gothic" charset="0"/>
+                      </a:endParaRPr>
+                    </a:p>
+                  </a:txBody>
+                  <a:tcPr marL="91440" marR="91440" marT="36576" marB="36576" anchor="ctr">
+                    <a:lnL w="9525" cap="flat" cmpd="sng" algn="ctr">
+                      <a:solidFill>
+                        <a:srgbClr val="D5DCE6"/>
+                      </a:solidFill>
+                      <a:prstDash val="solid"/>
+                      <a:round/>
+                      <a:headEnd type="none" w="med" len="med"/>
+                      <a:tailEnd type="none" w="med" len="med"/>
+                    </a:lnL>
+                    <a:lnR w="9525" cap="flat" cmpd="sng" algn="ctr">
+                      <a:solidFill>
+                        <a:srgbClr val="D5DCE6"/>
+                      </a:solidFill>
+                      <a:prstDash val="solid"/>
+                      <a:round/>
+                      <a:headEnd type="none" w="med" len="med"/>
+                      <a:tailEnd type="none" w="med" len="med"/>
+                    </a:lnR>
+                    <a:lnT w="9525" cap="flat" cmpd="sng" algn="ctr">
+                      <a:solidFill>
+                        <a:srgbClr val="D5DCE6"/>
+                      </a:solidFill>
+                      <a:prstDash val="solid"/>
+                      <a:round/>
+                      <a:headEnd type="none" w="med" len="med"/>
+                      <a:tailEnd type="none" w="med" len="med"/>
+                    </a:lnT>
+                    <a:lnB w="9525" cap="flat" cmpd="sng" algn="ctr">
+                      <a:solidFill>
+                        <a:srgbClr val="D5DCE6"/>
+                      </a:solidFill>
+                      <a:prstDash val="solid"/>
+                      <a:round/>
+                      <a:headEnd type="none" w="med" len="med"/>
+                      <a:tailEnd type="none" w="med" len="med"/>
+                    </a:lnB>
+                    <a:solidFill>
+                      <a:srgbClr val="FFFFFF"/>
+                    </a:solidFill>
+                  </a:tcPr>
+                </a:tc>
+                <a:tc>
+                  <a:txBody>
+                    <a:bodyPr/>
+                    <a:lstStyle/>
+                    <a:p>
+                      <a:pPr algn="l" indent="0" marL="0">
+                        <a:buNone/>
+                      </a:pPr>
+                      <a:r>
+                        <a:rPr lang="en-US" sz="1400" dirty="0">
+                          <a:solidFill>
+                            <a:srgbClr val="1B2A41"/>
+                          </a:solidFill>
+                          <a:latin typeface="Yu Gothic" pitchFamily="34" charset="0"/>
+                          <a:ea typeface="Yu Gothic" pitchFamily="34" charset="-122"/>
+                          <a:cs typeface="Yu Gothic" pitchFamily="34" charset="-120"/>
+                        </a:rPr>
+                        <a:t>「ml_forecastの沖縄の日照予報の期間で、出力制御の検証はできるか」</a:t>
+                      </a:r>
+                      <a:endParaRPr lang="en-US" sz="1400" dirty="0">
+                        <a:latin typeface="Yu Gothic" charset="0"/>
+                        <a:ea typeface="Yu Gothic" charset="0"/>
+                        <a:cs typeface="Yu Gothic" charset="0"/>
+                      </a:endParaRPr>
+                    </a:p>
+                  </a:txBody>
+                  <a:tcPr marL="91440" marR="91440" marT="36576" marB="36576" anchor="ctr">
+                    <a:lnL w="9525" cap="flat" cmpd="sng" algn="ctr">
+                      <a:solidFill>
+                        <a:srgbClr val="D5DCE6"/>
+                      </a:solidFill>
+                      <a:prstDash val="solid"/>
+                      <a:round/>
+                      <a:headEnd type="none" w="med" len="med"/>
+                      <a:tailEnd type="none" w="med" len="med"/>
+                    </a:lnL>
+                    <a:lnR w="9525" cap="flat" cmpd="sng" algn="ctr">
+                      <a:solidFill>
+                        <a:srgbClr val="D5DCE6"/>
+                      </a:solidFill>
+                      <a:prstDash val="solid"/>
+                      <a:round/>
+                      <a:headEnd type="none" w="med" len="med"/>
+                      <a:tailEnd type="none" w="med" len="med"/>
+                    </a:lnR>
+                    <a:lnT w="9525" cap="flat" cmpd="sng" algn="ctr">
+                      <a:solidFill>
+                        <a:srgbClr val="D5DCE6"/>
+                      </a:solidFill>
+                      <a:prstDash val="solid"/>
+                      <a:round/>
+                      <a:headEnd type="none" w="med" len="med"/>
+                      <a:tailEnd type="none" w="med" len="med"/>
+                    </a:lnT>
+                    <a:lnB w="9525" cap="flat" cmpd="sng" algn="ctr">
+                      <a:solidFill>
+                        <a:srgbClr val="D5DCE6"/>
+                      </a:solidFill>
+                      <a:prstDash val="solid"/>
+                      <a:round/>
+                      <a:headEnd type="none" w="med" len="med"/>
+                      <a:tailEnd type="none" w="med" len="med"/>
+                    </a:lnB>
+                    <a:solidFill>
+                      <a:srgbClr val="FFFFFF"/>
+                    </a:solidFill>
+                  </a:tcPr>
+                </a:tc>
+                <a:tc>
+                  <a:txBody>
+                    <a:bodyPr/>
+                    <a:lstStyle/>
+                    <a:p>
+                      <a:pPr algn="l" indent="0" marL="0">
+                        <a:buNone/>
+                      </a:pPr>
+                      <a:r>
+                        <a:rPr lang="en-US" sz="1400" dirty="0">
+                          <a:solidFill>
+                            <a:srgbClr val="1B2A41"/>
+                          </a:solidFill>
+                          <a:latin typeface="Yu Gothic" pitchFamily="34" charset="0"/>
+                          <a:ea typeface="Yu Gothic" pitchFamily="34" charset="-122"/>
+                          <a:cs typeface="Yu Gothic" pitchFamily="34" charset="-120"/>
+                        </a:rPr>
+                        <a:t>（検証を試みる前）</a:t>
+                      </a:r>
+                      <a:endParaRPr lang="en-US" sz="1400" dirty="0">
+                        <a:latin typeface="Yu Gothic" charset="0"/>
+                        <a:ea typeface="Yu Gothic" charset="0"/>
+                        <a:cs typeface="Yu Gothic" charset="0"/>
+                      </a:endParaRPr>
+                    </a:p>
+                  </a:txBody>
+                  <a:tcPr marL="91440" marR="91440" marT="36576" marB="36576" anchor="ctr">
+                    <a:lnL w="9525" cap="flat" cmpd="sng" algn="ctr">
+                      <a:solidFill>
+                        <a:srgbClr val="D5DCE6"/>
+                      </a:solidFill>
+                      <a:prstDash val="solid"/>
+                      <a:round/>
+                      <a:headEnd type="none" w="med" len="med"/>
+                      <a:tailEnd type="none" w="med" len="med"/>
+                    </a:lnL>
+                    <a:lnR w="9525" cap="flat" cmpd="sng" algn="ctr">
+                      <a:solidFill>
+                        <a:srgbClr val="D5DCE6"/>
+                      </a:solidFill>
+                      <a:prstDash val="solid"/>
+                      <a:round/>
+                      <a:headEnd type="none" w="med" len="med"/>
+                      <a:tailEnd type="none" w="med" len="med"/>
+                    </a:lnR>
+                    <a:lnT w="9525" cap="flat" cmpd="sng" algn="ctr">
+                      <a:solidFill>
+                        <a:srgbClr val="D5DCE6"/>
+                      </a:solidFill>
+                      <a:prstDash val="solid"/>
+                      <a:round/>
+                      <a:headEnd type="none" w="med" len="med"/>
+                      <a:tailEnd type="none" w="med" len="med"/>
+                    </a:lnT>
+                    <a:lnB w="9525" cap="flat" cmpd="sng" algn="ctr">
+                      <a:solidFill>
+                        <a:srgbClr val="D5DCE6"/>
+                      </a:solidFill>
+                      <a:prstDash val="solid"/>
+                      <a:round/>
+                      <a:headEnd type="none" w="med" len="med"/>
+                      <a:tailEnd type="none" w="med" len="med"/>
+                    </a:lnB>
+                    <a:solidFill>
+                      <a:srgbClr val="FFFFFF"/>
+                    </a:solidFill>
+                  </a:tcPr>
+                </a:tc>
+                <a:tc>
+                  <a:txBody>
+                    <a:bodyPr/>
+                    <a:lstStyle/>
+                    <a:p>
+                      <a:pPr algn="l" indent="0" marL="0">
+                        <a:buNone/>
+                      </a:pPr>
+                      <a:r>
+                        <a:rPr lang="en-US" sz="1400" dirty="0">
+                          <a:solidFill>
+                            <a:srgbClr val="1B2A41"/>
+                          </a:solidFill>
+                          <a:latin typeface="Yu Gothic" pitchFamily="34" charset="0"/>
+                          <a:ea typeface="Yu Gothic" pitchFamily="34" charset="-122"/>
+                          <a:cs typeface="Yu Gothic" pitchFamily="34" charset="-120"/>
+                        </a:rPr>
+                        <a:t>予報アーカイブ（2026年5月〜）と沖縄の制御データ（〜2026年3月）に重複なし。検証不可と明記</a:t>
+                      </a:r>
+                      <a:endParaRPr lang="en-US" sz="1400" dirty="0">
+                        <a:latin typeface="Yu Gothic" charset="0"/>
+                        <a:ea typeface="Yu Gothic" charset="0"/>
+                        <a:cs typeface="Yu Gothic" charset="0"/>
+                      </a:endParaRPr>
+                    </a:p>
+                  </a:txBody>
+                  <a:tcPr marL="91440" marR="91440" marT="36576" marB="36576" anchor="ctr">
+                    <a:lnL w="9525" cap="flat" cmpd="sng" algn="ctr">
+                      <a:solidFill>
+                        <a:srgbClr val="D5DCE6"/>
+                      </a:solidFill>
+                      <a:prstDash val="solid"/>
+                      <a:round/>
+                      <a:headEnd type="none" w="med" len="med"/>
+                      <a:tailEnd type="none" w="med" len="med"/>
+                    </a:lnL>
+                    <a:lnR w="9525" cap="flat" cmpd="sng" algn="ctr">
+                      <a:solidFill>
+                        <a:srgbClr val="D5DCE6"/>
+                      </a:solidFill>
+                      <a:prstDash val="solid"/>
+                      <a:round/>
+                      <a:headEnd type="none" w="med" len="med"/>
+                      <a:tailEnd type="none" w="med" len="med"/>
+                    </a:lnR>
+                    <a:lnT w="9525" cap="flat" cmpd="sng" algn="ctr">
+                      <a:solidFill>
+                        <a:srgbClr val="D5DCE6"/>
+                      </a:solidFill>
+                      <a:prstDash val="solid"/>
+                      <a:round/>
+                      <a:headEnd type="none" w="med" len="med"/>
+                      <a:tailEnd type="none" w="med" len="med"/>
+                    </a:lnT>
+                    <a:lnB w="9525" cap="flat" cmpd="sng" algn="ctr">
+                      <a:solidFill>
+                        <a:srgbClr val="D5DCE6"/>
+                      </a:solidFill>
+                      <a:prstDash val="solid"/>
+                      <a:round/>
+                      <a:headEnd type="none" w="med" len="med"/>
+                      <a:tailEnd type="none" w="med" len="med"/>
+                    </a:lnB>
+                    <a:solidFill>
+                      <a:srgbClr val="FFFFFF"/>
+                    </a:solidFill>
+                  </a:tcPr>
+                </a:tc>
+              </a:tr>
+              <a:tr h="1051560">
+                <a:tc>
+                  <a:txBody>
+                    <a:bodyPr/>
+                    <a:lstStyle/>
+                    <a:p>
+                      <a:pPr algn="l" indent="0" marL="0">
+                        <a:buNone/>
+                      </a:pPr>
+                      <a:r>
+                        <a:rPr lang="en-US" sz="1400" dirty="0">
+                          <a:solidFill>
+                            <a:srgbClr val="1B2A41"/>
+                          </a:solidFill>
+                          <a:latin typeface="Yu Gothic" pitchFamily="34" charset="0"/>
+                          <a:ea typeface="Yu Gothic" pitchFamily="34" charset="-122"/>
+                          <a:cs typeface="Yu Gothic" pitchFamily="34" charset="-120"/>
+                        </a:rPr>
+                        <a:t>4</a:t>
+                      </a:r>
+                      <a:endParaRPr lang="en-US" sz="1400" dirty="0">
+                        <a:latin typeface="Yu Gothic" charset="0"/>
+                        <a:ea typeface="Yu Gothic" charset="0"/>
+                        <a:cs typeface="Yu Gothic" charset="0"/>
+                      </a:endParaRPr>
+                    </a:p>
+                  </a:txBody>
+                  <a:tcPr marL="91440" marR="91440" marT="36576" marB="36576" anchor="ctr">
+                    <a:lnL w="9525" cap="flat" cmpd="sng" algn="ctr">
+                      <a:solidFill>
+                        <a:srgbClr val="D5DCE6"/>
+                      </a:solidFill>
+                      <a:prstDash val="solid"/>
+                      <a:round/>
+                      <a:headEnd type="none" w="med" len="med"/>
+                      <a:tailEnd type="none" w="med" len="med"/>
+                    </a:lnL>
+                    <a:lnR w="9525" cap="flat" cmpd="sng" algn="ctr">
+                      <a:solidFill>
+                        <a:srgbClr val="D5DCE6"/>
+                      </a:solidFill>
+                      <a:prstDash val="solid"/>
+                      <a:round/>
+                      <a:headEnd type="none" w="med" len="med"/>
+                      <a:tailEnd type="none" w="med" len="med"/>
+                    </a:lnR>
+                    <a:lnT w="9525" cap="flat" cmpd="sng" algn="ctr">
+                      <a:solidFill>
+                        <a:srgbClr val="D5DCE6"/>
+                      </a:solidFill>
+                      <a:prstDash val="solid"/>
+                      <a:round/>
+                      <a:headEnd type="none" w="med" len="med"/>
+                      <a:tailEnd type="none" w="med" len="med"/>
+                    </a:lnT>
+                    <a:lnB w="9525" cap="flat" cmpd="sng" algn="ctr">
+                      <a:solidFill>
+                        <a:srgbClr val="D5DCE6"/>
+                      </a:solidFill>
+                      <a:prstDash val="solid"/>
+                      <a:round/>
+                      <a:headEnd type="none" w="med" len="med"/>
+                      <a:tailEnd type="none" w="med" len="med"/>
+                    </a:lnB>
+                    <a:solidFill>
+                      <a:srgbClr val="F1F4F8"/>
+                    </a:solidFill>
+                  </a:tcPr>
+                </a:tc>
+                <a:tc>
+                  <a:txBody>
+                    <a:bodyPr/>
+                    <a:lstStyle/>
+                    <a:p>
+                      <a:pPr algn="l" indent="0" marL="0">
+                        <a:buNone/>
+                      </a:pPr>
+                      <a:r>
+                        <a:rPr lang="en-US" sz="1400" dirty="0">
+                          <a:solidFill>
+                            <a:srgbClr val="1B2A41"/>
+                          </a:solidFill>
+                          <a:latin typeface="Yu Gothic" pitchFamily="34" charset="0"/>
+                          <a:ea typeface="Yu Gothic" pitchFamily="34" charset="-122"/>
+                          <a:cs typeface="Yu Gothic" pitchFamily="34" charset="-120"/>
+                        </a:rPr>
+                        <a:t>「出力制御日は土日に多いというのは、季節による変動はないのか？」</a:t>
+                      </a:r>
+                      <a:endParaRPr lang="en-US" sz="1400" dirty="0">
+                        <a:latin typeface="Yu Gothic" charset="0"/>
+                        <a:ea typeface="Yu Gothic" charset="0"/>
+                        <a:cs typeface="Yu Gothic" charset="0"/>
+                      </a:endParaRPr>
+                    </a:p>
+                  </a:txBody>
+                  <a:tcPr marL="91440" marR="91440" marT="36576" marB="36576" anchor="ctr">
+                    <a:lnL w="9525" cap="flat" cmpd="sng" algn="ctr">
+                      <a:solidFill>
+                        <a:srgbClr val="D5DCE6"/>
+                      </a:solidFill>
+                      <a:prstDash val="solid"/>
+                      <a:round/>
+                      <a:headEnd type="none" w="med" len="med"/>
+                      <a:tailEnd type="none" w="med" len="med"/>
+                    </a:lnL>
+                    <a:lnR w="9525" cap="flat" cmpd="sng" algn="ctr">
+                      <a:solidFill>
+                        <a:srgbClr val="D5DCE6"/>
+                      </a:solidFill>
+                      <a:prstDash val="solid"/>
+                      <a:round/>
+                      <a:headEnd type="none" w="med" len="med"/>
+                      <a:tailEnd type="none" w="med" len="med"/>
+                    </a:lnR>
+                    <a:lnT w="9525" cap="flat" cmpd="sng" algn="ctr">
+                      <a:solidFill>
+                        <a:srgbClr val="D5DCE6"/>
+                      </a:solidFill>
+                      <a:prstDash val="solid"/>
+                      <a:round/>
+                      <a:headEnd type="none" w="med" len="med"/>
+                      <a:tailEnd type="none" w="med" len="med"/>
+                    </a:lnT>
+                    <a:lnB w="9525" cap="flat" cmpd="sng" algn="ctr">
+                      <a:solidFill>
+                        <a:srgbClr val="D5DCE6"/>
+                      </a:solidFill>
+                      <a:prstDash val="solid"/>
+                      <a:round/>
+                      <a:headEnd type="none" w="med" len="med"/>
+                      <a:tailEnd type="none" w="med" len="med"/>
+                    </a:lnB>
+                    <a:solidFill>
+                      <a:srgbClr val="F1F4F8"/>
+                    </a:solidFill>
+                  </a:tcPr>
+                </a:tc>
+                <a:tc>
+                  <a:txBody>
+                    <a:bodyPr/>
+                    <a:lstStyle/>
+                    <a:p>
+                      <a:pPr algn="l" indent="0" marL="0">
+                        <a:buNone/>
+                      </a:pPr>
+                      <a:r>
+                        <a:rPr lang="en-US" sz="1400" dirty="0">
+                          <a:solidFill>
+                            <a:srgbClr val="1B2A41"/>
+                          </a:solidFill>
+                          <a:latin typeface="Yu Gothic" pitchFamily="34" charset="0"/>
+                          <a:ea typeface="Yu Gothic" pitchFamily="34" charset="-122"/>
+                          <a:cs typeface="Yu Gothic" pitchFamily="34" charset="-120"/>
+                        </a:rPr>
+                        <a:t>季節を区別せず「土日の割合37.4%」を1つの数字で結論づけた</a:t>
+                      </a:r>
+                      <a:endParaRPr lang="en-US" sz="1400" dirty="0">
+                        <a:latin typeface="Yu Gothic" charset="0"/>
+                        <a:ea typeface="Yu Gothic" charset="0"/>
+                        <a:cs typeface="Yu Gothic" charset="0"/>
+                      </a:endParaRPr>
+                    </a:p>
+                  </a:txBody>
+                  <a:tcPr marL="91440" marR="91440" marT="36576" marB="36576" anchor="ctr">
+                    <a:lnL w="9525" cap="flat" cmpd="sng" algn="ctr">
+                      <a:solidFill>
+                        <a:srgbClr val="D5DCE6"/>
+                      </a:solidFill>
+                      <a:prstDash val="solid"/>
+                      <a:round/>
+                      <a:headEnd type="none" w="med" len="med"/>
+                      <a:tailEnd type="none" w="med" len="med"/>
+                    </a:lnL>
+                    <a:lnR w="9525" cap="flat" cmpd="sng" algn="ctr">
+                      <a:solidFill>
+                        <a:srgbClr val="D5DCE6"/>
+                      </a:solidFill>
+                      <a:prstDash val="solid"/>
+                      <a:round/>
+                      <a:headEnd type="none" w="med" len="med"/>
+                      <a:tailEnd type="none" w="med" len="med"/>
+                    </a:lnR>
+                    <a:lnT w="9525" cap="flat" cmpd="sng" algn="ctr">
+                      <a:solidFill>
+                        <a:srgbClr val="D5DCE6"/>
+                      </a:solidFill>
+                      <a:prstDash val="solid"/>
+                      <a:round/>
+                      <a:headEnd type="none" w="med" len="med"/>
+                      <a:tailEnd type="none" w="med" len="med"/>
+                    </a:lnT>
+                    <a:lnB w="9525" cap="flat" cmpd="sng" algn="ctr">
+                      <a:solidFill>
+                        <a:srgbClr val="D5DCE6"/>
+                      </a:solidFill>
+                      <a:prstDash val="solid"/>
+                      <a:round/>
+                      <a:headEnd type="none" w="med" len="med"/>
+                      <a:tailEnd type="none" w="med" len="med"/>
+                    </a:lnB>
+                    <a:solidFill>
+                      <a:srgbClr val="F1F4F8"/>
+                    </a:solidFill>
+                  </a:tcPr>
+                </a:tc>
+                <a:tc>
+                  <a:txBody>
+                    <a:bodyPr/>
+                    <a:lstStyle/>
+                    <a:p>
+                      <a:pPr algn="l" indent="0" marL="0">
+                        <a:buNone/>
+                      </a:pPr>
+                      <a:r>
+                        <a:rPr lang="en-US" sz="1400" dirty="0">
+                          <a:solidFill>
+                            <a:srgbClr val="1B2A41"/>
+                          </a:solidFill>
+                          <a:latin typeface="Yu Gothic" pitchFamily="34" charset="0"/>
+                          <a:ea typeface="Yu Gothic" pitchFamily="34" charset="-122"/>
+                          <a:cs typeface="Yu Gothic" pitchFamily="34" charset="-120"/>
+                        </a:rPr>
+                        <a:t>月別に集計し、季節で正反対の2パターン（春=頻発・曜日差小、夏〜初秋=希少・土日に偏る）が混在と判明</a:t>
+                      </a:r>
+                      <a:endParaRPr lang="en-US" sz="1400" dirty="0">
+                        <a:latin typeface="Yu Gothic" charset="0"/>
+                        <a:ea typeface="Yu Gothic" charset="0"/>
+                        <a:cs typeface="Yu Gothic" charset="0"/>
+                      </a:endParaRPr>
+                    </a:p>
+                  </a:txBody>
+                  <a:tcPr marL="91440" marR="91440" marT="36576" marB="36576" anchor="ctr">
+                    <a:lnL w="9525" cap="flat" cmpd="sng" algn="ctr">
+                      <a:solidFill>
+                        <a:srgbClr val="D5DCE6"/>
+                      </a:solidFill>
+                      <a:prstDash val="solid"/>
+                      <a:round/>
+                      <a:headEnd type="none" w="med" len="med"/>
+                      <a:tailEnd type="none" w="med" len="med"/>
+                    </a:lnL>
+                    <a:lnR w="9525" cap="flat" cmpd="sng" algn="ctr">
+                      <a:solidFill>
+                        <a:srgbClr val="D5DCE6"/>
+                      </a:solidFill>
+                      <a:prstDash val="solid"/>
+                      <a:round/>
+                      <a:headEnd type="none" w="med" len="med"/>
+                      <a:tailEnd type="none" w="med" len="med"/>
+                    </a:lnR>
+                    <a:lnT w="9525" cap="flat" cmpd="sng" algn="ctr">
+                      <a:solidFill>
+                        <a:srgbClr val="D5DCE6"/>
+                      </a:solidFill>
+                      <a:prstDash val="solid"/>
+                      <a:round/>
+                      <a:headEnd type="none" w="med" len="med"/>
+                      <a:tailEnd type="none" w="med" len="med"/>
+                    </a:lnT>
+                    <a:lnB w="9525" cap="flat" cmpd="sng" algn="ctr">
+                      <a:solidFill>
+                        <a:srgbClr val="D5DCE6"/>
+                      </a:solidFill>
+                      <a:prstDash val="solid"/>
+                      <a:round/>
+                      <a:headEnd type="none" w="med" len="med"/>
+                      <a:tailEnd type="none" w="med" len="med"/>
+                    </a:lnB>
+                    <a:solidFill>
+                      <a:srgbClr val="F1F4F8"/>
+                    </a:solidFill>
+                  </a:tcPr>
+                </a:tc>
+              </a:tr>
+            </a:tbl>
+          </a:graphicData>
+        </a:graphic>
+      </p:graphicFrame>
+      <p:sp>
+        <p:nvSpPr>
+          <p:cNvPr id="25" name="Slide Number Placeholder 0"/>
+          <p:cNvSpPr>
+            <a:spLocks noGrp="1"/>
+          </p:cNvSpPr>
+          <p:nvPr>
+            <p:ph type="sldNum" sz="quarter" idx="4294967295"/>
+          </p:nvPr>
+        </p:nvSpPr>
+        <p:spPr>
+          <a:xfrm>
+            <a:off x="11247120" y="6400800"/>
+            <a:ext cx="548640" cy="274320"/>
+          </a:xfrm>
+          <a:prstGeom prst="rect">
+            <a:avLst/>
+          </a:prstGeom>
+          <a:extLst>
+            <a:ext uri="{C572A759-6A51-4108-AA02-DFA0A04FC94B}">
+              <ma14:wrappingTextBoxFlag xmlns:ma14="http://schemas.microsoft.com/office/mac/drawingml/2011/main" val="0"/>
+            </a:ext>
+          </a:extLst>
+        </p:spPr>
+        <p:txBody>
+          <a:bodyPr/>
+          <a:lstStyle>
+            <a:lvl1pPr>
+              <a:defRPr sz="1200">
+                <a:solidFill>
+                  <a:srgbClr val="7A8BA3"/>
+                </a:solidFill>
+              </a:defRPr>
+            </a:lvl1pPr>
+          </a:lstStyle>
+          <a:p>
+            <a:pPr algn="r"/>
+            <a:fld id="{F7021451-1387-4CA6-816F-3879F97B5CBC}" type="slidenum">
+              <a:rPr b="0" lang="en-US"/>
+              <a:t>14</a:t>
+            </a:fld>
+            <a:endParaRPr lang="en-US"/>
+          </a:p>
+        </p:txBody>
+      </p:sp>
+    </p:spTree>
+  </p:cSld>
+  <p:clrMapOvr>
+    <a:masterClrMapping/>
+  </p:clrMapOvr>
+</p:sld>
+</file>
+
+<file path=ppt/slides/slide15.xml><?xml version="1.0" encoding="utf-8"?>
+<p:sld xmlns:a="http://schemas.openxmlformats.org/drawingml/2006/main" xmlns:r="http://schemas.openxmlformats.org/officeDocument/2006/relationships" xmlns:p="http://schemas.openxmlformats.org/presentationml/2006/main">
+  <p:cSld name="Slide 15">
+    <p:spTree>
+      <p:nvGrpSpPr>
+        <p:cNvPr id="1" name=""/>
+        <p:cNvGrpSpPr/>
+        <p:nvPr/>
+      </p:nvGrpSpPr>
+      <p:grpSpPr>
+        <a:xfrm>
+          <a:off x="0" y="0"/>
+          <a:ext cx="0" cy="0"/>
+          <a:chOff x="0" y="0"/>
+          <a:chExt cx="0" cy="0"/>
+        </a:xfrm>
+      </p:grpSpPr>
+      <p:sp>
+        <p:nvSpPr>
+          <p:cNvPr id="2" name="Text 0"/>
+          <p:cNvSpPr/>
+          <p:nvPr>
+            <p:ph idx="100" type="title" hasCustomPrompt="1"/>
+          </p:nvPr>
+        </p:nvSpPr>
+        <p:spPr>
+          <a:xfrm>
+            <a:off x="548640" y="320040"/>
+            <a:ext cx="11064240" cy="868680"/>
+          </a:xfrm>
+          <a:prstGeom prst="rect">
+            <a:avLst/>
+          </a:prstGeom>
+          <a:noFill/>
+          <a:ln/>
+        </p:spPr>
+        <p:txBody>
+          <a:bodyPr wrap="square" lIns="0" tIns="0" rIns="0" bIns="0" rtlCol="0" anchor="ctr"/>
+          <a:lstStyle/>
+          <a:p>
+            <a:pPr algn="l" indent="0" marL="0">
+              <a:buNone/>
+            </a:pPr>
+            <a:r>
+              <a:rPr lang="en-US" sz="3200" b="1" dirty="0">
+                <a:solidFill>
+                  <a:schemeClr val="tx1"/>
+                </a:solidFill>
+              </a:rPr>
+              <a:t>ユーザー指摘による訂正一覧（2/2）</a:t>
+            </a:r>
+            <a:endParaRPr lang="en-US" sz="3200" dirty="0"/>
+          </a:p>
+        </p:txBody>
+      </p:sp>
+      <p:graphicFrame>
+        <p:nvGraphicFramePr>
+          <p:cNvPr id="16" name="corrections-table-2"/>
+          <p:cNvGraphicFramePr>
+            <a:graphicFrameLocks noGrp="1"/>
+          </p:cNvGraphicFramePr>
+          <p:nvPr>
+            <p:extLst>
+              <p:ext uri="{D42A27DB-BD31-4B8C-83A1-F6EECF244321}">
+                <p14:modId xmlns:p14="http://schemas.microsoft.com/office/powerpoint/2010/main" val="1579011935"/>
+              </p:ext>
+            </p:extLst>
+          </p:nvPr>
+        </p:nvGraphicFramePr>
+        <p:xfrm>
+          <a:off x="548640" y="1280160"/>
+          <a:ext cx="11064240" cy="914400"/>
+        </p:xfrm>
+        <a:graphic>
+          <a:graphicData uri="http://schemas.openxmlformats.org/drawingml/2006/table">
+            <a:tbl>
+              <a:tblPr/>
+              <a:tblGrid>
+                <a:gridCol w="457200"/>
+                <a:gridCol w="3200400"/>
+                <a:gridCol w="3108960"/>
+                <a:gridCol w="4297680"/>
+              </a:tblGrid>
+              <a:tr h="457200">
+                <a:tc>
+                  <a:txBody>
+                    <a:bodyPr/>
+                    <a:lstStyle/>
+                    <a:p>
+                      <a:pPr algn="ctr" indent="0" marL="0">
+                        <a:buNone/>
+                      </a:pPr>
+                      <a:r>
+                        <a:rPr lang="en-US" sz="1400" b="1" dirty="0">
+                          <a:solidFill>
+                            <a:srgbClr val="FFFFFF"/>
+                          </a:solidFill>
+                          <a:latin typeface="Yu Gothic" pitchFamily="34" charset="0"/>
+                          <a:ea typeface="Yu Gothic" pitchFamily="34" charset="-122"/>
+                          <a:cs typeface="Yu Gothic" pitchFamily="34" charset="-120"/>
+                        </a:rPr>
+                        <a:t>#</a:t>
+                      </a:r>
+                      <a:endParaRPr lang="en-US" sz="1400" dirty="0">
+                        <a:latin typeface="Yu Gothic" charset="0"/>
+                        <a:ea typeface="Yu Gothic" charset="0"/>
+                        <a:cs typeface="Yu Gothic" charset="0"/>
+                      </a:endParaRPr>
+                    </a:p>
+                  </a:txBody>
+                  <a:tcPr marL="91440" marR="91440" marT="36576" marB="36576" anchor="ctr">
+                    <a:lnL w="9525" cap="flat" cmpd="sng" algn="ctr">
+                      <a:solidFill>
+                        <a:srgbClr val="D5DCE6"/>
+                      </a:solidFill>
+                      <a:prstDash val="solid"/>
+                      <a:round/>
+                      <a:headEnd type="none" w="med" len="med"/>
+                      <a:tailEnd type="none" w="med" len="med"/>
+                    </a:lnL>
+                    <a:lnR w="9525" cap="flat" cmpd="sng" algn="ctr">
+                      <a:solidFill>
+                        <a:srgbClr val="D5DCE6"/>
+                      </a:solidFill>
+                      <a:prstDash val="solid"/>
+                      <a:round/>
+                      <a:headEnd type="none" w="med" len="med"/>
+                      <a:tailEnd type="none" w="med" len="med"/>
+                    </a:lnR>
+                    <a:lnT w="9525" cap="flat" cmpd="sng" algn="ctr">
+                      <a:solidFill>
+                        <a:srgbClr val="D5DCE6"/>
+                      </a:solidFill>
+                      <a:prstDash val="solid"/>
+                      <a:round/>
+                      <a:headEnd type="none" w="med" len="med"/>
+                      <a:tailEnd type="none" w="med" len="med"/>
+                    </a:lnT>
+                    <a:lnB w="9525" cap="flat" cmpd="sng" algn="ctr">
+                      <a:solidFill>
+                        <a:srgbClr val="D5DCE6"/>
+                      </a:solidFill>
+                      <a:prstDash val="solid"/>
+                      <a:round/>
+                      <a:headEnd type="none" w="med" len="med"/>
+                      <a:tailEnd type="none" w="med" len="med"/>
+                    </a:lnB>
+                    <a:solidFill>
+                      <a:srgbClr val="1B2A41"/>
+                    </a:solidFill>
+                  </a:tcPr>
+                </a:tc>
+                <a:tc>
+                  <a:txBody>
+                    <a:bodyPr/>
+                    <a:lstStyle/>
+                    <a:p>
+                      <a:pPr algn="ctr" indent="0" marL="0">
+                        <a:buNone/>
+                      </a:pPr>
+                      <a:r>
+                        <a:rPr lang="en-US" sz="1400" b="1" dirty="0">
+                          <a:solidFill>
+                            <a:srgbClr val="FFFFFF"/>
+                          </a:solidFill>
+                          <a:latin typeface="Yu Gothic" pitchFamily="34" charset="0"/>
+                          <a:ea typeface="Yu Gothic" pitchFamily="34" charset="-122"/>
+                          <a:cs typeface="Yu Gothic" pitchFamily="34" charset="-120"/>
+                        </a:rPr>
+                        <a:t>ユーザーの指摘・質問</a:t>
+                      </a:r>
+                      <a:endParaRPr lang="en-US" sz="1400" dirty="0">
+                        <a:latin typeface="Yu Gothic" charset="0"/>
+                        <a:ea typeface="Yu Gothic" charset="0"/>
+                        <a:cs typeface="Yu Gothic" charset="0"/>
+                      </a:endParaRPr>
+                    </a:p>
+                  </a:txBody>
+                  <a:tcPr marL="91440" marR="91440" marT="36576" marB="36576" anchor="ctr">
+                    <a:lnL w="9525" cap="flat" cmpd="sng" algn="ctr">
+                      <a:solidFill>
+                        <a:srgbClr val="D5DCE6"/>
+                      </a:solidFill>
+                      <a:prstDash val="solid"/>
+                      <a:round/>
+                      <a:headEnd type="none" w="med" len="med"/>
+                      <a:tailEnd type="none" w="med" len="med"/>
+                    </a:lnL>
+                    <a:lnR w="9525" cap="flat" cmpd="sng" algn="ctr">
+                      <a:solidFill>
+                        <a:srgbClr val="D5DCE6"/>
+                      </a:solidFill>
+                      <a:prstDash val="solid"/>
+                      <a:round/>
+                      <a:headEnd type="none" w="med" len="med"/>
+                      <a:tailEnd type="none" w="med" len="med"/>
+                    </a:lnR>
+                    <a:lnT w="9525" cap="flat" cmpd="sng" algn="ctr">
+                      <a:solidFill>
+                        <a:srgbClr val="D5DCE6"/>
+                      </a:solidFill>
+                      <a:prstDash val="solid"/>
+                      <a:round/>
+                      <a:headEnd type="none" w="med" len="med"/>
+                      <a:tailEnd type="none" w="med" len="med"/>
+                    </a:lnT>
+                    <a:lnB w="9525" cap="flat" cmpd="sng" algn="ctr">
+                      <a:solidFill>
+                        <a:srgbClr val="D5DCE6"/>
+                      </a:solidFill>
+                      <a:prstDash val="solid"/>
+                      <a:round/>
+                      <a:headEnd type="none" w="med" len="med"/>
+                      <a:tailEnd type="none" w="med" len="med"/>
+                    </a:lnB>
+                    <a:solidFill>
+                      <a:srgbClr val="1B2A41"/>
+                    </a:solidFill>
+                  </a:tcPr>
+                </a:tc>
+                <a:tc>
+                  <a:txBody>
+                    <a:bodyPr/>
+                    <a:lstStyle/>
+                    <a:p>
+                      <a:pPr algn="ctr" indent="0" marL="0">
+                        <a:buNone/>
+                      </a:pPr>
+                      <a:r>
+                        <a:rPr lang="en-US" sz="1400" b="1" dirty="0">
+                          <a:solidFill>
+                            <a:srgbClr val="FFFFFF"/>
+                          </a:solidFill>
+                          <a:latin typeface="Yu Gothic" pitchFamily="34" charset="0"/>
+                          <a:ea typeface="Yu Gothic" pitchFamily="34" charset="-122"/>
+                          <a:cs typeface="Yu Gothic" pitchFamily="34" charset="-120"/>
+                        </a:rPr>
+                        <a:t>当初の問題点</a:t>
+                      </a:r>
+                      <a:endParaRPr lang="en-US" sz="1400" dirty="0">
+                        <a:latin typeface="Yu Gothic" charset="0"/>
+                        <a:ea typeface="Yu Gothic" charset="0"/>
+                        <a:cs typeface="Yu Gothic" charset="0"/>
+                      </a:endParaRPr>
+                    </a:p>
+                  </a:txBody>
+                  <a:tcPr marL="91440" marR="91440" marT="36576" marB="36576" anchor="ctr">
+                    <a:lnL w="9525" cap="flat" cmpd="sng" algn="ctr">
+                      <a:solidFill>
+                        <a:srgbClr val="D5DCE6"/>
+                      </a:solidFill>
+                      <a:prstDash val="solid"/>
+                      <a:round/>
+                      <a:headEnd type="none" w="med" len="med"/>
+                      <a:tailEnd type="none" w="med" len="med"/>
+                    </a:lnL>
+                    <a:lnR w="9525" cap="flat" cmpd="sng" algn="ctr">
+                      <a:solidFill>
+                        <a:srgbClr val="D5DCE6"/>
+                      </a:solidFill>
+                      <a:prstDash val="solid"/>
+                      <a:round/>
+                      <a:headEnd type="none" w="med" len="med"/>
+                      <a:tailEnd type="none" w="med" len="med"/>
+                    </a:lnR>
+                    <a:lnT w="9525" cap="flat" cmpd="sng" algn="ctr">
+                      <a:solidFill>
+                        <a:srgbClr val="D5DCE6"/>
+                      </a:solidFill>
+                      <a:prstDash val="solid"/>
+                      <a:round/>
+                      <a:headEnd type="none" w="med" len="med"/>
+                      <a:tailEnd type="none" w="med" len="med"/>
+                    </a:lnT>
+                    <a:lnB w="9525" cap="flat" cmpd="sng" algn="ctr">
+                      <a:solidFill>
+                        <a:srgbClr val="D5DCE6"/>
+                      </a:solidFill>
+                      <a:prstDash val="solid"/>
+                      <a:round/>
+                      <a:headEnd type="none" w="med" len="med"/>
+                      <a:tailEnd type="none" w="med" len="med"/>
+                    </a:lnB>
+                    <a:solidFill>
+                      <a:srgbClr val="1B2A41"/>
+                    </a:solidFill>
+                  </a:tcPr>
+                </a:tc>
+                <a:tc>
+                  <a:txBody>
+                    <a:bodyPr/>
+                    <a:lstStyle/>
+                    <a:p>
+                      <a:pPr algn="ctr" indent="0" marL="0">
+                        <a:buNone/>
+                      </a:pPr>
+                      <a:r>
+                        <a:rPr lang="en-US" sz="1400" b="1" dirty="0">
+                          <a:solidFill>
+                            <a:srgbClr val="FFFFFF"/>
+                          </a:solidFill>
+                          <a:latin typeface="Yu Gothic" pitchFamily="34" charset="0"/>
+                          <a:ea typeface="Yu Gothic" pitchFamily="34" charset="-122"/>
+                          <a:cs typeface="Yu Gothic" pitchFamily="34" charset="-120"/>
+                        </a:rPr>
+                        <a:t>調査・結果</a:t>
+                      </a:r>
+                      <a:endParaRPr lang="en-US" sz="1400" dirty="0">
+                        <a:latin typeface="Yu Gothic" charset="0"/>
+                        <a:ea typeface="Yu Gothic" charset="0"/>
+                        <a:cs typeface="Yu Gothic" charset="0"/>
+                      </a:endParaRPr>
+                    </a:p>
+                  </a:txBody>
+                  <a:tcPr marL="91440" marR="91440" marT="36576" marB="36576" anchor="ctr">
+                    <a:lnL w="9525" cap="flat" cmpd="sng" algn="ctr">
+                      <a:solidFill>
+                        <a:srgbClr val="D5DCE6"/>
+                      </a:solidFill>
+                      <a:prstDash val="solid"/>
+                      <a:round/>
+                      <a:headEnd type="none" w="med" len="med"/>
+                      <a:tailEnd type="none" w="med" len="med"/>
+                    </a:lnL>
+                    <a:lnR w="9525" cap="flat" cmpd="sng" algn="ctr">
+                      <a:solidFill>
+                        <a:srgbClr val="D5DCE6"/>
+                      </a:solidFill>
+                      <a:prstDash val="solid"/>
+                      <a:round/>
+                      <a:headEnd type="none" w="med" len="med"/>
+                      <a:tailEnd type="none" w="med" len="med"/>
+                    </a:lnR>
+                    <a:lnT w="9525" cap="flat" cmpd="sng" algn="ctr">
+                      <a:solidFill>
+                        <a:srgbClr val="D5DCE6"/>
+                      </a:solidFill>
+                      <a:prstDash val="solid"/>
+                      <a:round/>
+                      <a:headEnd type="none" w="med" len="med"/>
+                      <a:tailEnd type="none" w="med" len="med"/>
+                    </a:lnT>
+                    <a:lnB w="9525" cap="flat" cmpd="sng" algn="ctr">
+                      <a:solidFill>
+                        <a:srgbClr val="D5DCE6"/>
+                      </a:solidFill>
+                      <a:prstDash val="solid"/>
+                      <a:round/>
+                      <a:headEnd type="none" w="med" len="med"/>
+                      <a:tailEnd type="none" w="med" len="med"/>
+                    </a:lnB>
+                    <a:solidFill>
+                      <a:srgbClr val="1B2A41"/>
+                    </a:solidFill>
+                  </a:tcPr>
+                </a:tc>
+              </a:tr>
+              <a:tr h="1051560">
+                <a:tc>
+                  <a:txBody>
+                    <a:bodyPr/>
+                    <a:lstStyle/>
+                    <a:p>
+                      <a:pPr algn="l" indent="0" marL="0">
+                        <a:buNone/>
+                      </a:pPr>
+                      <a:r>
+                        <a:rPr lang="en-US" sz="1400" dirty="0">
+                          <a:solidFill>
+                            <a:srgbClr val="1B2A41"/>
+                          </a:solidFill>
+                          <a:latin typeface="Yu Gothic" pitchFamily="34" charset="0"/>
+                          <a:ea typeface="Yu Gothic" pitchFamily="34" charset="-122"/>
+                          <a:cs typeface="Yu Gothic" pitchFamily="34" charset="-120"/>
+                        </a:rPr>
+                        <a:t>5</a:t>
+                      </a:r>
+                      <a:endParaRPr lang="en-US" sz="1400" dirty="0">
+                        <a:latin typeface="Yu Gothic" charset="0"/>
+                        <a:ea typeface="Yu Gothic" charset="0"/>
+                        <a:cs typeface="Yu Gothic" charset="0"/>
+                      </a:endParaRPr>
+                    </a:p>
+                  </a:txBody>
+                  <a:tcPr marL="91440" marR="91440" marT="36576" marB="36576" anchor="ctr">
+                    <a:lnL w="9525" cap="flat" cmpd="sng" algn="ctr">
+                      <a:solidFill>
+                        <a:srgbClr val="D5DCE6"/>
+                      </a:solidFill>
+                      <a:prstDash val="solid"/>
+                      <a:round/>
+                      <a:headEnd type="none" w="med" len="med"/>
+                      <a:tailEnd type="none" w="med" len="med"/>
+                    </a:lnL>
+                    <a:lnR w="9525" cap="flat" cmpd="sng" algn="ctr">
+                      <a:solidFill>
+                        <a:srgbClr val="D5DCE6"/>
+                      </a:solidFill>
+                      <a:prstDash val="solid"/>
+                      <a:round/>
+                      <a:headEnd type="none" w="med" len="med"/>
+                      <a:tailEnd type="none" w="med" len="med"/>
+                    </a:lnR>
+                    <a:lnT w="9525" cap="flat" cmpd="sng" algn="ctr">
+                      <a:solidFill>
+                        <a:srgbClr val="D5DCE6"/>
+                      </a:solidFill>
+                      <a:prstDash val="solid"/>
+                      <a:round/>
+                      <a:headEnd type="none" w="med" len="med"/>
+                      <a:tailEnd type="none" w="med" len="med"/>
+                    </a:lnT>
+                    <a:lnB w="9525" cap="flat" cmpd="sng" algn="ctr">
+                      <a:solidFill>
+                        <a:srgbClr val="D5DCE6"/>
+                      </a:solidFill>
+                      <a:prstDash val="solid"/>
+                      <a:round/>
+                      <a:headEnd type="none" w="med" len="med"/>
+                      <a:tailEnd type="none" w="med" len="med"/>
+                    </a:lnB>
+                    <a:solidFill>
+                      <a:srgbClr val="FFFFFF"/>
+                    </a:solidFill>
+                  </a:tcPr>
+                </a:tc>
+                <a:tc>
+                  <a:txBody>
+                    <a:bodyPr/>
+                    <a:lstStyle/>
+                    <a:p>
+                      <a:pPr algn="l" indent="0" marL="0">
+                        <a:buNone/>
+                      </a:pPr>
+                      <a:r>
+                        <a:rPr lang="en-US" sz="1400" dirty="0">
+                          <a:solidFill>
+                            <a:srgbClr val="1B2A41"/>
+                          </a:solidFill>
+                          <a:latin typeface="Yu Gothic" pitchFamily="34" charset="0"/>
+                          <a:ea typeface="Yu Gothic" pitchFamily="34" charset="-122"/>
+                          <a:cs typeface="Yu Gothic" pitchFamily="34" charset="-120"/>
+                        </a:rPr>
+                        <a:t>「reportの図も季節別の分析に対応させて変更した？まとめも」</a:t>
+                      </a:r>
+                      <a:endParaRPr lang="en-US" sz="1400" dirty="0">
+                        <a:latin typeface="Yu Gothic" charset="0"/>
+                        <a:ea typeface="Yu Gothic" charset="0"/>
+                        <a:cs typeface="Yu Gothic" charset="0"/>
+                      </a:endParaRPr>
+                    </a:p>
+                  </a:txBody>
+                  <a:tcPr marL="91440" marR="91440" marT="36576" marB="36576" anchor="ctr">
+                    <a:lnL w="9525" cap="flat" cmpd="sng" algn="ctr">
+                      <a:solidFill>
+                        <a:srgbClr val="D5DCE6"/>
+                      </a:solidFill>
+                      <a:prstDash val="solid"/>
+                      <a:round/>
+                      <a:headEnd type="none" w="med" len="med"/>
+                      <a:tailEnd type="none" w="med" len="med"/>
+                    </a:lnL>
+                    <a:lnR w="9525" cap="flat" cmpd="sng" algn="ctr">
+                      <a:solidFill>
+                        <a:srgbClr val="D5DCE6"/>
+                      </a:solidFill>
+                      <a:prstDash val="solid"/>
+                      <a:round/>
+                      <a:headEnd type="none" w="med" len="med"/>
+                      <a:tailEnd type="none" w="med" len="med"/>
+                    </a:lnR>
+                    <a:lnT w="9525" cap="flat" cmpd="sng" algn="ctr">
+                      <a:solidFill>
+                        <a:srgbClr val="D5DCE6"/>
+                      </a:solidFill>
+                      <a:prstDash val="solid"/>
+                      <a:round/>
+                      <a:headEnd type="none" w="med" len="med"/>
+                      <a:tailEnd type="none" w="med" len="med"/>
+                    </a:lnT>
+                    <a:lnB w="9525" cap="flat" cmpd="sng" algn="ctr">
+                      <a:solidFill>
+                        <a:srgbClr val="D5DCE6"/>
+                      </a:solidFill>
+                      <a:prstDash val="solid"/>
+                      <a:round/>
+                      <a:headEnd type="none" w="med" len="med"/>
+                      <a:tailEnd type="none" w="med" len="med"/>
+                    </a:lnB>
+                    <a:solidFill>
+                      <a:srgbClr val="FFFFFF"/>
+                    </a:solidFill>
+                  </a:tcPr>
+                </a:tc>
+                <a:tc>
+                  <a:txBody>
+                    <a:bodyPr/>
+                    <a:lstStyle/>
+                    <a:p>
+                      <a:pPr algn="l" indent="0" marL="0">
+                        <a:buNone/>
+                      </a:pPr>
+                      <a:r>
+                        <a:rPr lang="en-US" sz="1400" dirty="0">
+                          <a:solidFill>
+                            <a:srgbClr val="1B2A41"/>
+                          </a:solidFill>
+                          <a:latin typeface="Yu Gothic" pitchFamily="34" charset="0"/>
+                          <a:ea typeface="Yu Gothic" pitchFamily="34" charset="-122"/>
+                          <a:cs typeface="Yu Gothic" pitchFamily="34" charset="-120"/>
+                        </a:rPr>
+                        <a:t>季節変動を文章に書いただけで、図・モデル・まとめ表に未反映</a:t>
+                      </a:r>
+                      <a:endParaRPr lang="en-US" sz="1400" dirty="0">
+                        <a:latin typeface="Yu Gothic" charset="0"/>
+                        <a:ea typeface="Yu Gothic" charset="0"/>
+                        <a:cs typeface="Yu Gothic" charset="0"/>
+                      </a:endParaRPr>
+                    </a:p>
+                  </a:txBody>
+                  <a:tcPr marL="91440" marR="91440" marT="36576" marB="36576" anchor="ctr">
+                    <a:lnL w="9525" cap="flat" cmpd="sng" algn="ctr">
+                      <a:solidFill>
+                        <a:srgbClr val="D5DCE6"/>
+                      </a:solidFill>
+                      <a:prstDash val="solid"/>
+                      <a:round/>
+                      <a:headEnd type="none" w="med" len="med"/>
+                      <a:tailEnd type="none" w="med" len="med"/>
+                    </a:lnL>
+                    <a:lnR w="9525" cap="flat" cmpd="sng" algn="ctr">
+                      <a:solidFill>
+                        <a:srgbClr val="D5DCE6"/>
+                      </a:solidFill>
+                      <a:prstDash val="solid"/>
+                      <a:round/>
+                      <a:headEnd type="none" w="med" len="med"/>
+                      <a:tailEnd type="none" w="med" len="med"/>
+                    </a:lnR>
+                    <a:lnT w="9525" cap="flat" cmpd="sng" algn="ctr">
+                      <a:solidFill>
+                        <a:srgbClr val="D5DCE6"/>
+                      </a:solidFill>
+                      <a:prstDash val="solid"/>
+                      <a:round/>
+                      <a:headEnd type="none" w="med" len="med"/>
+                      <a:tailEnd type="none" w="med" len="med"/>
+                    </a:lnT>
+                    <a:lnB w="9525" cap="flat" cmpd="sng" algn="ctr">
+                      <a:solidFill>
+                        <a:srgbClr val="D5DCE6"/>
+                      </a:solidFill>
+                      <a:prstDash val="solid"/>
+                      <a:round/>
+                      <a:headEnd type="none" w="med" len="med"/>
+                      <a:tailEnd type="none" w="med" len="med"/>
+                    </a:lnB>
+                    <a:solidFill>
+                      <a:srgbClr val="FFFFFF"/>
+                    </a:solidFill>
+                  </a:tcPr>
+                </a:tc>
+                <a:tc>
+                  <a:txBody>
+                    <a:bodyPr/>
+                    <a:lstStyle/>
+                    <a:p>
+                      <a:pPr algn="l" indent="0" marL="0">
+                        <a:buNone/>
+                      </a:pPr>
+                      <a:r>
+                        <a:rPr lang="en-US" sz="1400" dirty="0">
+                          <a:solidFill>
+                            <a:srgbClr val="1B2A41"/>
+                          </a:solidFill>
+                          <a:latin typeface="Yu Gothic" pitchFamily="34" charset="0"/>
+                          <a:ea typeface="Yu Gothic" pitchFamily="34" charset="-122"/>
+                          <a:cs typeface="Yu Gothic" pitchFamily="34" charset="-120"/>
+                        </a:rPr>
+                        <a:t>月をダミー変数としてロジスティック回帰に追加。AUC 0.669→0.852。季節が最強の予測因子と判明</a:t>
+                      </a:r>
+                      <a:endParaRPr lang="en-US" sz="1400" dirty="0">
+                        <a:latin typeface="Yu Gothic" charset="0"/>
+                        <a:ea typeface="Yu Gothic" charset="0"/>
+                        <a:cs typeface="Yu Gothic" charset="0"/>
+                      </a:endParaRPr>
+                    </a:p>
+                  </a:txBody>
+                  <a:tcPr marL="91440" marR="91440" marT="36576" marB="36576" anchor="ctr">
+                    <a:lnL w="9525" cap="flat" cmpd="sng" algn="ctr">
+                      <a:solidFill>
+                        <a:srgbClr val="D5DCE6"/>
+                      </a:solidFill>
+                      <a:prstDash val="solid"/>
+                      <a:round/>
+                      <a:headEnd type="none" w="med" len="med"/>
+                      <a:tailEnd type="none" w="med" len="med"/>
+                    </a:lnL>
+                    <a:lnR w="9525" cap="flat" cmpd="sng" algn="ctr">
+                      <a:solidFill>
+                        <a:srgbClr val="D5DCE6"/>
+                      </a:solidFill>
+                      <a:prstDash val="solid"/>
+                      <a:round/>
+                      <a:headEnd type="none" w="med" len="med"/>
+                      <a:tailEnd type="none" w="med" len="med"/>
+                    </a:lnR>
+                    <a:lnT w="9525" cap="flat" cmpd="sng" algn="ctr">
+                      <a:solidFill>
+                        <a:srgbClr val="D5DCE6"/>
+                      </a:solidFill>
+                      <a:prstDash val="solid"/>
+                      <a:round/>
+                      <a:headEnd type="none" w="med" len="med"/>
+                      <a:tailEnd type="none" w="med" len="med"/>
+                    </a:lnT>
+                    <a:lnB w="9525" cap="flat" cmpd="sng" algn="ctr">
+                      <a:solidFill>
+                        <a:srgbClr val="D5DCE6"/>
+                      </a:solidFill>
+                      <a:prstDash val="solid"/>
+                      <a:round/>
+                      <a:headEnd type="none" w="med" len="med"/>
+                      <a:tailEnd type="none" w="med" len="med"/>
+                    </a:lnB>
+                    <a:solidFill>
+                      <a:srgbClr val="FFFFFF"/>
+                    </a:solidFill>
+                  </a:tcPr>
+                </a:tc>
+              </a:tr>
+              <a:tr h="1051560">
+                <a:tc>
+                  <a:txBody>
+                    <a:bodyPr/>
+                    <a:lstStyle/>
+                    <a:p>
+                      <a:pPr algn="l" indent="0" marL="0">
+                        <a:buNone/>
+                      </a:pPr>
+                      <a:r>
+                        <a:rPr lang="en-US" sz="1400" dirty="0">
+                          <a:solidFill>
+                            <a:srgbClr val="1B2A41"/>
+                          </a:solidFill>
+                          <a:latin typeface="Yu Gothic" pitchFamily="34" charset="0"/>
+                          <a:ea typeface="Yu Gothic" pitchFamily="34" charset="-122"/>
+                          <a:cs typeface="Yu Gothic" pitchFamily="34" charset="-120"/>
+                        </a:rPr>
+                        <a:t>6</a:t>
+                      </a:r>
+                      <a:endParaRPr lang="en-US" sz="1400" dirty="0">
+                        <a:latin typeface="Yu Gothic" charset="0"/>
+                        <a:ea typeface="Yu Gothic" charset="0"/>
+                        <a:cs typeface="Yu Gothic" charset="0"/>
+                      </a:endParaRPr>
+                    </a:p>
+                  </a:txBody>
+                  <a:tcPr marL="91440" marR="91440" marT="36576" marB="36576" anchor="ctr">
+                    <a:lnL w="9525" cap="flat" cmpd="sng" algn="ctr">
+                      <a:solidFill>
+                        <a:srgbClr val="D5DCE6"/>
+                      </a:solidFill>
+                      <a:prstDash val="solid"/>
+                      <a:round/>
+                      <a:headEnd type="none" w="med" len="med"/>
+                      <a:tailEnd type="none" w="med" len="med"/>
+                    </a:lnL>
+                    <a:lnR w="9525" cap="flat" cmpd="sng" algn="ctr">
+                      <a:solidFill>
+                        <a:srgbClr val="D5DCE6"/>
+                      </a:solidFill>
+                      <a:prstDash val="solid"/>
+                      <a:round/>
+                      <a:headEnd type="none" w="med" len="med"/>
+                      <a:tailEnd type="none" w="med" len="med"/>
+                    </a:lnR>
+                    <a:lnT w="9525" cap="flat" cmpd="sng" algn="ctr">
+                      <a:solidFill>
+                        <a:srgbClr val="D5DCE6"/>
+                      </a:solidFill>
+                      <a:prstDash val="solid"/>
+                      <a:round/>
+                      <a:headEnd type="none" w="med" len="med"/>
+                      <a:tailEnd type="none" w="med" len="med"/>
+                    </a:lnT>
+                    <a:lnB w="9525" cap="flat" cmpd="sng" algn="ctr">
+                      <a:solidFill>
+                        <a:srgbClr val="D5DCE6"/>
+                      </a:solidFill>
+                      <a:prstDash val="solid"/>
+                      <a:round/>
+                      <a:headEnd type="none" w="med" len="med"/>
+                      <a:tailEnd type="none" w="med" len="med"/>
+                    </a:lnB>
+                    <a:solidFill>
+                      <a:srgbClr val="F1F4F8"/>
+                    </a:solidFill>
+                  </a:tcPr>
+                </a:tc>
+                <a:tc>
+                  <a:txBody>
+                    <a:bodyPr/>
+                    <a:lstStyle/>
+                    <a:p>
+                      <a:pPr algn="l" indent="0" marL="0">
+                        <a:buNone/>
+                      </a:pPr>
+                      <a:r>
+                        <a:rPr lang="en-US" sz="1400" dirty="0">
+                          <a:solidFill>
+                            <a:srgbClr val="1B2A41"/>
+                          </a:solidFill>
+                          <a:latin typeface="Yu Gothic" pitchFamily="34" charset="0"/>
+                          <a:ea typeface="Yu Gothic" pitchFamily="34" charset="-122"/>
+                          <a:cs typeface="Yu Gothic" pitchFamily="34" charset="-120"/>
+                        </a:rPr>
+                        <a:t>「発電量の比較は風力も入れているが日射量と無関係。太陽光のみのデータはないのか？」</a:t>
+                      </a:r>
+                      <a:endParaRPr lang="en-US" sz="1400" dirty="0">
+                        <a:latin typeface="Yu Gothic" charset="0"/>
+                        <a:ea typeface="Yu Gothic" charset="0"/>
+                        <a:cs typeface="Yu Gothic" charset="0"/>
+                      </a:endParaRPr>
+                    </a:p>
+                  </a:txBody>
+                  <a:tcPr marL="91440" marR="91440" marT="36576" marB="36576" anchor="ctr">
+                    <a:lnL w="9525" cap="flat" cmpd="sng" algn="ctr">
+                      <a:solidFill>
+                        <a:srgbClr val="D5DCE6"/>
+                      </a:solidFill>
+                      <a:prstDash val="solid"/>
+                      <a:round/>
+                      <a:headEnd type="none" w="med" len="med"/>
+                      <a:tailEnd type="none" w="med" len="med"/>
+                    </a:lnL>
+                    <a:lnR w="9525" cap="flat" cmpd="sng" algn="ctr">
+                      <a:solidFill>
+                        <a:srgbClr val="D5DCE6"/>
+                      </a:solidFill>
+                      <a:prstDash val="solid"/>
+                      <a:round/>
+                      <a:headEnd type="none" w="med" len="med"/>
+                      <a:tailEnd type="none" w="med" len="med"/>
+                    </a:lnR>
+                    <a:lnT w="9525" cap="flat" cmpd="sng" algn="ctr">
+                      <a:solidFill>
+                        <a:srgbClr val="D5DCE6"/>
+                      </a:solidFill>
+                      <a:prstDash val="solid"/>
+                      <a:round/>
+                      <a:headEnd type="none" w="med" len="med"/>
+                      <a:tailEnd type="none" w="med" len="med"/>
+                    </a:lnT>
+                    <a:lnB w="9525" cap="flat" cmpd="sng" algn="ctr">
+                      <a:solidFill>
+                        <a:srgbClr val="D5DCE6"/>
+                      </a:solidFill>
+                      <a:prstDash val="solid"/>
+                      <a:round/>
+                      <a:headEnd type="none" w="med" len="med"/>
+                      <a:tailEnd type="none" w="med" len="med"/>
+                    </a:lnB>
+                    <a:solidFill>
+                      <a:srgbClr val="F1F4F8"/>
+                    </a:solidFill>
+                  </a:tcPr>
+                </a:tc>
+                <a:tc>
+                  <a:txBody>
+                    <a:bodyPr/>
+                    <a:lstStyle/>
+                    <a:p>
+                      <a:pPr algn="l" indent="0" marL="0">
+                        <a:buNone/>
+                      </a:pPr>
+                      <a:r>
+                        <a:rPr lang="en-US" sz="1400" dirty="0">
+                          <a:solidFill>
+                            <a:srgbClr val="1B2A41"/>
+                          </a:solidFill>
+                          <a:latin typeface="Yu Gothic" pitchFamily="34" charset="0"/>
+                          <a:ea typeface="Yu Gothic" pitchFamily="34" charset="-122"/>
+                          <a:cs typeface="Yu Gothic" pitchFamily="34" charset="-120"/>
+                        </a:rPr>
+                        <a:t>風力＋太陽光の合計を、太陽光単独の相関として報告していた</a:t>
+                      </a:r>
+                      <a:endParaRPr lang="en-US" sz="1400" dirty="0">
+                        <a:latin typeface="Yu Gothic" charset="0"/>
+                        <a:ea typeface="Yu Gothic" charset="0"/>
+                        <a:cs typeface="Yu Gothic" charset="0"/>
+                      </a:endParaRPr>
+                    </a:p>
+                  </a:txBody>
+                  <a:tcPr marL="91440" marR="91440" marT="36576" marB="36576" anchor="ctr">
+                    <a:lnL w="9525" cap="flat" cmpd="sng" algn="ctr">
+                      <a:solidFill>
+                        <a:srgbClr val="D5DCE6"/>
+                      </a:solidFill>
+                      <a:prstDash val="solid"/>
+                      <a:round/>
+                      <a:headEnd type="none" w="med" len="med"/>
+                      <a:tailEnd type="none" w="med" len="med"/>
+                    </a:lnL>
+                    <a:lnR w="9525" cap="flat" cmpd="sng" algn="ctr">
+                      <a:solidFill>
+                        <a:srgbClr val="D5DCE6"/>
+                      </a:solidFill>
+                      <a:prstDash val="solid"/>
+                      <a:round/>
+                      <a:headEnd type="none" w="med" len="med"/>
+                      <a:tailEnd type="none" w="med" len="med"/>
+                    </a:lnR>
+                    <a:lnT w="9525" cap="flat" cmpd="sng" algn="ctr">
+                      <a:solidFill>
+                        <a:srgbClr val="D5DCE6"/>
+                      </a:solidFill>
+                      <a:prstDash val="solid"/>
+                      <a:round/>
+                      <a:headEnd type="none" w="med" len="med"/>
+                      <a:tailEnd type="none" w="med" len="med"/>
+                    </a:lnT>
+                    <a:lnB w="9525" cap="flat" cmpd="sng" algn="ctr">
+                      <a:solidFill>
+                        <a:srgbClr val="D5DCE6"/>
+                      </a:solidFill>
+                      <a:prstDash val="solid"/>
+                      <a:round/>
+                      <a:headEnd type="none" w="med" len="med"/>
+                      <a:tailEnd type="none" w="med" len="med"/>
+                    </a:lnB>
+                    <a:solidFill>
+                      <a:srgbClr val="F1F4F8"/>
+                    </a:solidFill>
+                  </a:tcPr>
+                </a:tc>
+                <a:tc>
+                  <a:txBody>
+                    <a:bodyPr/>
+                    <a:lstStyle/>
+                    <a:p>
+                      <a:pPr algn="l" indent="0" marL="0">
+                        <a:buNone/>
+                      </a:pPr>
+                      <a:r>
+                        <a:rPr lang="en-US" sz="1400" dirty="0">
+                          <a:solidFill>
+                            <a:srgbClr val="1B2A41"/>
+                          </a:solidFill>
+                          <a:latin typeface="Yu Gothic" pitchFamily="34" charset="0"/>
+                          <a:ea typeface="Yu Gothic" pitchFamily="34" charset="-122"/>
+                          <a:cs typeface="Yu Gothic" pitchFamily="34" charset="-120"/>
+                        </a:rPr>
+                        <a:t>太陽光単独の実績（旧形式＋新形式）を取得。相関が強まり（全天日射量 r 0.819→0.835）データの正確性が向上</a:t>
+                      </a:r>
+                      <a:endParaRPr lang="en-US" sz="1400" dirty="0">
+                        <a:latin typeface="Yu Gothic" charset="0"/>
+                        <a:ea typeface="Yu Gothic" charset="0"/>
+                        <a:cs typeface="Yu Gothic" charset="0"/>
+                      </a:endParaRPr>
+                    </a:p>
+                  </a:txBody>
+                  <a:tcPr marL="91440" marR="91440" marT="36576" marB="36576" anchor="ctr">
+                    <a:lnL w="9525" cap="flat" cmpd="sng" algn="ctr">
+                      <a:solidFill>
+                        <a:srgbClr val="D5DCE6"/>
+                      </a:solidFill>
+                      <a:prstDash val="solid"/>
+                      <a:round/>
+                      <a:headEnd type="none" w="med" len="med"/>
+                      <a:tailEnd type="none" w="med" len="med"/>
+                    </a:lnL>
+                    <a:lnR w="9525" cap="flat" cmpd="sng" algn="ctr">
+                      <a:solidFill>
+                        <a:srgbClr val="D5DCE6"/>
+                      </a:solidFill>
+                      <a:prstDash val="solid"/>
+                      <a:round/>
+                      <a:headEnd type="none" w="med" len="med"/>
+                      <a:tailEnd type="none" w="med" len="med"/>
+                    </a:lnR>
+                    <a:lnT w="9525" cap="flat" cmpd="sng" algn="ctr">
+                      <a:solidFill>
+                        <a:srgbClr val="D5DCE6"/>
+                      </a:solidFill>
+                      <a:prstDash val="solid"/>
+                      <a:round/>
+                      <a:headEnd type="none" w="med" len="med"/>
+                      <a:tailEnd type="none" w="med" len="med"/>
+                    </a:lnT>
+                    <a:lnB w="9525" cap="flat" cmpd="sng" algn="ctr">
+                      <a:solidFill>
+                        <a:srgbClr val="D5DCE6"/>
+                      </a:solidFill>
+                      <a:prstDash val="solid"/>
+                      <a:round/>
+                      <a:headEnd type="none" w="med" len="med"/>
+                      <a:tailEnd type="none" w="med" len="med"/>
+                    </a:lnB>
+                    <a:solidFill>
+                      <a:srgbClr val="F1F4F8"/>
+                    </a:solidFill>
+                  </a:tcPr>
+                </a:tc>
+              </a:tr>
+              <a:tr h="1051560">
+                <a:tc>
+                  <a:txBody>
+                    <a:bodyPr/>
+                    <a:lstStyle/>
+                    <a:p>
+                      <a:pPr algn="l" indent="0" marL="0">
+                        <a:buNone/>
+                      </a:pPr>
+                      <a:r>
+                        <a:rPr lang="en-US" sz="1400" dirty="0">
+                          <a:solidFill>
+                            <a:srgbClr val="1B2A41"/>
+                          </a:solidFill>
+                          <a:latin typeface="Yu Gothic" pitchFamily="34" charset="0"/>
+                          <a:ea typeface="Yu Gothic" pitchFamily="34" charset="-122"/>
+                          <a:cs typeface="Yu Gothic" pitchFamily="34" charset="-120"/>
+                        </a:rPr>
+                        <a:t>7</a:t>
+                      </a:r>
+                      <a:endParaRPr lang="en-US" sz="1400" dirty="0">
+                        <a:latin typeface="Yu Gothic" charset="0"/>
+                        <a:ea typeface="Yu Gothic" charset="0"/>
+                        <a:cs typeface="Yu Gothic" charset="0"/>
+                      </a:endParaRPr>
+                    </a:p>
+                  </a:txBody>
+                  <a:tcPr marL="91440" marR="91440" marT="36576" marB="36576" anchor="ctr">
+                    <a:lnL w="9525" cap="flat" cmpd="sng" algn="ctr">
+                      <a:solidFill>
+                        <a:srgbClr val="D5DCE6"/>
+                      </a:solidFill>
+                      <a:prstDash val="solid"/>
+                      <a:round/>
+                      <a:headEnd type="none" w="med" len="med"/>
+                      <a:tailEnd type="none" w="med" len="med"/>
+                    </a:lnL>
+                    <a:lnR w="9525" cap="flat" cmpd="sng" algn="ctr">
+                      <a:solidFill>
+                        <a:srgbClr val="D5DCE6"/>
+                      </a:solidFill>
+                      <a:prstDash val="solid"/>
+                      <a:round/>
+                      <a:headEnd type="none" w="med" len="med"/>
+                      <a:tailEnd type="none" w="med" len="med"/>
+                    </a:lnR>
+                    <a:lnT w="9525" cap="flat" cmpd="sng" algn="ctr">
+                      <a:solidFill>
+                        <a:srgbClr val="D5DCE6"/>
+                      </a:solidFill>
+                      <a:prstDash val="solid"/>
+                      <a:round/>
+                      <a:headEnd type="none" w="med" len="med"/>
+                      <a:tailEnd type="none" w="med" len="med"/>
+                    </a:lnT>
+                    <a:lnB w="9525" cap="flat" cmpd="sng" algn="ctr">
+                      <a:solidFill>
+                        <a:srgbClr val="D5DCE6"/>
+                      </a:solidFill>
+                      <a:prstDash val="solid"/>
+                      <a:round/>
+                      <a:headEnd type="none" w="med" len="med"/>
+                      <a:tailEnd type="none" w="med" len="med"/>
+                    </a:lnB>
+                    <a:solidFill>
+                      <a:srgbClr val="FFFFFF"/>
+                    </a:solidFill>
+                  </a:tcPr>
+                </a:tc>
+                <a:tc>
+                  <a:txBody>
+                    <a:bodyPr/>
+                    <a:lstStyle/>
+                    <a:p>
+                      <a:pPr algn="l" indent="0" marL="0">
+                        <a:buNone/>
+                      </a:pPr>
+                      <a:r>
+                        <a:rPr lang="en-US" sz="1400" dirty="0">
+                          <a:solidFill>
+                            <a:srgbClr val="1B2A41"/>
+                          </a:solidFill>
+                          <a:latin typeface="Yu Gothic" pitchFamily="34" charset="0"/>
+                          <a:ea typeface="Yu Gothic" pitchFamily="34" charset="-122"/>
+                          <a:cs typeface="Yu Gothic" pitchFamily="34" charset="-120"/>
+                        </a:rPr>
+                        <a:t>「太陽光発電量は、電力会社が太陽光発電の電力を買った量？」</a:t>
+                      </a:r>
+                      <a:endParaRPr lang="en-US" sz="1400" dirty="0">
+                        <a:latin typeface="Yu Gothic" charset="0"/>
+                        <a:ea typeface="Yu Gothic" charset="0"/>
+                        <a:cs typeface="Yu Gothic" charset="0"/>
+                      </a:endParaRPr>
+                    </a:p>
+                  </a:txBody>
+                  <a:tcPr marL="91440" marR="91440" marT="36576" marB="36576" anchor="ctr">
+                    <a:lnL w="9525" cap="flat" cmpd="sng" algn="ctr">
+                      <a:solidFill>
+                        <a:srgbClr val="D5DCE6"/>
+                      </a:solidFill>
+                      <a:prstDash val="solid"/>
+                      <a:round/>
+                      <a:headEnd type="none" w="med" len="med"/>
+                      <a:tailEnd type="none" w="med" len="med"/>
+                    </a:lnL>
+                    <a:lnR w="9525" cap="flat" cmpd="sng" algn="ctr">
+                      <a:solidFill>
+                        <a:srgbClr val="D5DCE6"/>
+                      </a:solidFill>
+                      <a:prstDash val="solid"/>
+                      <a:round/>
+                      <a:headEnd type="none" w="med" len="med"/>
+                      <a:tailEnd type="none" w="med" len="med"/>
+                    </a:lnR>
+                    <a:lnT w="9525" cap="flat" cmpd="sng" algn="ctr">
+                      <a:solidFill>
+                        <a:srgbClr val="D5DCE6"/>
+                      </a:solidFill>
+                      <a:prstDash val="solid"/>
+                      <a:round/>
+                      <a:headEnd type="none" w="med" len="med"/>
+                      <a:tailEnd type="none" w="med" len="med"/>
+                    </a:lnT>
+                    <a:lnB w="9525" cap="flat" cmpd="sng" algn="ctr">
+                      <a:solidFill>
+                        <a:srgbClr val="D5DCE6"/>
+                      </a:solidFill>
+                      <a:prstDash val="solid"/>
+                      <a:round/>
+                      <a:headEnd type="none" w="med" len="med"/>
+                      <a:tailEnd type="none" w="med" len="med"/>
+                    </a:lnB>
+                    <a:solidFill>
+                      <a:srgbClr val="FFFFFF"/>
+                    </a:solidFill>
+                  </a:tcPr>
+                </a:tc>
+                <a:tc>
+                  <a:txBody>
+                    <a:bodyPr/>
+                    <a:lstStyle/>
+                    <a:p>
+                      <a:pPr algn="l" indent="0" marL="0">
+                        <a:buNone/>
+                      </a:pPr>
+                      <a:r>
+                        <a:rPr lang="en-US" sz="1400" dirty="0">
+                          <a:solidFill>
+                            <a:srgbClr val="1B2A41"/>
+                          </a:solidFill>
+                          <a:latin typeface="Yu Gothic" pitchFamily="34" charset="0"/>
+                          <a:ea typeface="Yu Gothic" pitchFamily="34" charset="-122"/>
+                          <a:cs typeface="Yu Gothic" pitchFamily="34" charset="-120"/>
+                        </a:rPr>
+                        <a:t>「発電量」を無頓着に使用（パネルの発電能力と誤解されうる）</a:t>
+                      </a:r>
+                      <a:endParaRPr lang="en-US" sz="1400" dirty="0">
+                        <a:latin typeface="Yu Gothic" charset="0"/>
+                        <a:ea typeface="Yu Gothic" charset="0"/>
+                        <a:cs typeface="Yu Gothic" charset="0"/>
+                      </a:endParaRPr>
+                    </a:p>
+                  </a:txBody>
+                  <a:tcPr marL="91440" marR="91440" marT="36576" marB="36576" anchor="ctr">
+                    <a:lnL w="9525" cap="flat" cmpd="sng" algn="ctr">
+                      <a:solidFill>
+                        <a:srgbClr val="D5DCE6"/>
+                      </a:solidFill>
+                      <a:prstDash val="solid"/>
+                      <a:round/>
+                      <a:headEnd type="none" w="med" len="med"/>
+                      <a:tailEnd type="none" w="med" len="med"/>
+                    </a:lnL>
+                    <a:lnR w="9525" cap="flat" cmpd="sng" algn="ctr">
+                      <a:solidFill>
+                        <a:srgbClr val="D5DCE6"/>
+                      </a:solidFill>
+                      <a:prstDash val="solid"/>
+                      <a:round/>
+                      <a:headEnd type="none" w="med" len="med"/>
+                      <a:tailEnd type="none" w="med" len="med"/>
+                    </a:lnR>
+                    <a:lnT w="9525" cap="flat" cmpd="sng" algn="ctr">
+                      <a:solidFill>
+                        <a:srgbClr val="D5DCE6"/>
+                      </a:solidFill>
+                      <a:prstDash val="solid"/>
+                      <a:round/>
+                      <a:headEnd type="none" w="med" len="med"/>
+                      <a:tailEnd type="none" w="med" len="med"/>
+                    </a:lnT>
+                    <a:lnB w="9525" cap="flat" cmpd="sng" algn="ctr">
+                      <a:solidFill>
+                        <a:srgbClr val="D5DCE6"/>
+                      </a:solidFill>
+                      <a:prstDash val="solid"/>
+                      <a:round/>
+                      <a:headEnd type="none" w="med" len="med"/>
+                      <a:tailEnd type="none" w="med" len="med"/>
+                    </a:lnB>
+                    <a:solidFill>
+                      <a:srgbClr val="FFFFFF"/>
+                    </a:solidFill>
+                  </a:tcPr>
+                </a:tc>
+                <a:tc>
+                  <a:txBody>
+                    <a:bodyPr/>
+                    <a:lstStyle/>
+                    <a:p>
+                      <a:pPr algn="l" indent="0" marL="0">
+                        <a:buNone/>
+                      </a:pPr>
+                      <a:r>
+                        <a:rPr lang="en-US" sz="1400" dirty="0">
+                          <a:solidFill>
+                            <a:srgbClr val="1B2A41"/>
+                          </a:solidFill>
+                          <a:latin typeface="Yu Gothic" pitchFamily="34" charset="0"/>
+                          <a:ea typeface="Yu Gothic" pitchFamily="34" charset="-122"/>
+                          <a:cs typeface="Yu Gothic" pitchFamily="34" charset="-120"/>
+                        </a:rPr>
+                        <a:t>出典を確認し「系統に実際に流れ込んだ出力」と定義。README・REPORT・docstringに明記</a:t>
+                      </a:r>
+                      <a:endParaRPr lang="en-US" sz="1400" dirty="0">
+                        <a:latin typeface="Yu Gothic" charset="0"/>
+                        <a:ea typeface="Yu Gothic" charset="0"/>
+                        <a:cs typeface="Yu Gothic" charset="0"/>
+                      </a:endParaRPr>
+                    </a:p>
+                  </a:txBody>
+                  <a:tcPr marL="91440" marR="91440" marT="36576" marB="36576" anchor="ctr">
+                    <a:lnL w="9525" cap="flat" cmpd="sng" algn="ctr">
+                      <a:solidFill>
+                        <a:srgbClr val="D5DCE6"/>
+                      </a:solidFill>
+                      <a:prstDash val="solid"/>
+                      <a:round/>
+                      <a:headEnd type="none" w="med" len="med"/>
+                      <a:tailEnd type="none" w="med" len="med"/>
+                    </a:lnL>
+                    <a:lnR w="9525" cap="flat" cmpd="sng" algn="ctr">
+                      <a:solidFill>
+                        <a:srgbClr val="D5DCE6"/>
+                      </a:solidFill>
+                      <a:prstDash val="solid"/>
+                      <a:round/>
+                      <a:headEnd type="none" w="med" len="med"/>
+                      <a:tailEnd type="none" w="med" len="med"/>
+                    </a:lnR>
+                    <a:lnT w="9525" cap="flat" cmpd="sng" algn="ctr">
+                      <a:solidFill>
+                        <a:srgbClr val="D5DCE6"/>
+                      </a:solidFill>
+                      <a:prstDash val="solid"/>
+                      <a:round/>
+                      <a:headEnd type="none" w="med" len="med"/>
+                      <a:tailEnd type="none" w="med" len="med"/>
+                    </a:lnT>
+                    <a:lnB w="9525" cap="flat" cmpd="sng" algn="ctr">
+                      <a:solidFill>
+                        <a:srgbClr val="D5DCE6"/>
+                      </a:solidFill>
+                      <a:prstDash val="solid"/>
+                      <a:round/>
+                      <a:headEnd type="none" w="med" len="med"/>
+                      <a:tailEnd type="none" w="med" len="med"/>
+                    </a:lnB>
+                    <a:solidFill>
+                      <a:srgbClr val="FFFFFF"/>
+                    </a:solidFill>
+                  </a:tcPr>
+                </a:tc>
+              </a:tr>
+              <a:tr h="1051560">
+                <a:tc>
+                  <a:txBody>
+                    <a:bodyPr/>
+                    <a:lstStyle/>
+                    <a:p>
+                      <a:pPr algn="l" indent="0" marL="0">
+                        <a:buNone/>
+                      </a:pPr>
+                      <a:r>
+                        <a:rPr lang="en-US" sz="1400" dirty="0">
+                          <a:solidFill>
+                            <a:srgbClr val="1B2A41"/>
+                          </a:solidFill>
+                          <a:latin typeface="Yu Gothic" pitchFamily="34" charset="0"/>
+                          <a:ea typeface="Yu Gothic" pitchFamily="34" charset="-122"/>
+                          <a:cs typeface="Yu Gothic" pitchFamily="34" charset="-120"/>
+                        </a:rPr>
+                        <a:t>8</a:t>
+                      </a:r>
+                      <a:endParaRPr lang="en-US" sz="1400" dirty="0">
+                        <a:latin typeface="Yu Gothic" charset="0"/>
+                        <a:ea typeface="Yu Gothic" charset="0"/>
+                        <a:cs typeface="Yu Gothic" charset="0"/>
+                      </a:endParaRPr>
+                    </a:p>
+                  </a:txBody>
+                  <a:tcPr marL="91440" marR="91440" marT="36576" marB="36576" anchor="ctr">
+                    <a:lnL w="9525" cap="flat" cmpd="sng" algn="ctr">
+                      <a:solidFill>
+                        <a:srgbClr val="D5DCE6"/>
+                      </a:solidFill>
+                      <a:prstDash val="solid"/>
+                      <a:round/>
+                      <a:headEnd type="none" w="med" len="med"/>
+                      <a:tailEnd type="none" w="med" len="med"/>
+                    </a:lnL>
+                    <a:lnR w="9525" cap="flat" cmpd="sng" algn="ctr">
+                      <a:solidFill>
+                        <a:srgbClr val="D5DCE6"/>
+                      </a:solidFill>
+                      <a:prstDash val="solid"/>
+                      <a:round/>
+                      <a:headEnd type="none" w="med" len="med"/>
+                      <a:tailEnd type="none" w="med" len="med"/>
+                    </a:lnR>
+                    <a:lnT w="9525" cap="flat" cmpd="sng" algn="ctr">
+                      <a:solidFill>
+                        <a:srgbClr val="D5DCE6"/>
+                      </a:solidFill>
+                      <a:prstDash val="solid"/>
+                      <a:round/>
+                      <a:headEnd type="none" w="med" len="med"/>
+                      <a:tailEnd type="none" w="med" len="med"/>
+                    </a:lnT>
+                    <a:lnB w="9525" cap="flat" cmpd="sng" algn="ctr">
+                      <a:solidFill>
+                        <a:srgbClr val="D5DCE6"/>
+                      </a:solidFill>
+                      <a:prstDash val="solid"/>
+                      <a:round/>
+                      <a:headEnd type="none" w="med" len="med"/>
+                      <a:tailEnd type="none" w="med" len="med"/>
+                    </a:lnB>
+                    <a:solidFill>
+                      <a:srgbClr val="F1F4F8"/>
+                    </a:solidFill>
+                  </a:tcPr>
+                </a:tc>
+                <a:tc>
+                  <a:txBody>
+                    <a:bodyPr/>
+                    <a:lstStyle/>
+                    <a:p>
+                      <a:pPr algn="l" indent="0" marL="0">
+                        <a:buNone/>
+                      </a:pPr>
+                      <a:r>
+                        <a:rPr lang="en-US" sz="1400" dirty="0">
+                          <a:solidFill>
+                            <a:srgbClr val="1B2A41"/>
+                          </a:solidFill>
+                          <a:latin typeface="Yu Gothic" pitchFamily="34" charset="0"/>
+                          <a:ea typeface="Yu Gothic" pitchFamily="34" charset="-122"/>
+                          <a:cs typeface="Yu Gothic" pitchFamily="34" charset="-120"/>
+                        </a:rPr>
+                        <a:t>「⑧図の相関図がわからない。日射量が小さい領域では出力制御をかけないのでは？」</a:t>
+                      </a:r>
+                      <a:endParaRPr lang="en-US" sz="1400" dirty="0">
+                        <a:latin typeface="Yu Gothic" charset="0"/>
+                        <a:ea typeface="Yu Gothic" charset="0"/>
+                        <a:cs typeface="Yu Gothic" charset="0"/>
+                      </a:endParaRPr>
+                    </a:p>
+                  </a:txBody>
+                  <a:tcPr marL="91440" marR="91440" marT="36576" marB="36576" anchor="ctr">
+                    <a:lnL w="9525" cap="flat" cmpd="sng" algn="ctr">
+                      <a:solidFill>
+                        <a:srgbClr val="D5DCE6"/>
+                      </a:solidFill>
+                      <a:prstDash val="solid"/>
+                      <a:round/>
+                      <a:headEnd type="none" w="med" len="med"/>
+                      <a:tailEnd type="none" w="med" len="med"/>
+                    </a:lnL>
+                    <a:lnR w="9525" cap="flat" cmpd="sng" algn="ctr">
+                      <a:solidFill>
+                        <a:srgbClr val="D5DCE6"/>
+                      </a:solidFill>
+                      <a:prstDash val="solid"/>
+                      <a:round/>
+                      <a:headEnd type="none" w="med" len="med"/>
+                      <a:tailEnd type="none" w="med" len="med"/>
+                    </a:lnR>
+                    <a:lnT w="9525" cap="flat" cmpd="sng" algn="ctr">
+                      <a:solidFill>
+                        <a:srgbClr val="D5DCE6"/>
+                      </a:solidFill>
+                      <a:prstDash val="solid"/>
+                      <a:round/>
+                      <a:headEnd type="none" w="med" len="med"/>
+                      <a:tailEnd type="none" w="med" len="med"/>
+                    </a:lnT>
+                    <a:lnB w="9525" cap="flat" cmpd="sng" algn="ctr">
+                      <a:solidFill>
+                        <a:srgbClr val="D5DCE6"/>
+                      </a:solidFill>
+                      <a:prstDash val="solid"/>
+                      <a:round/>
+                      <a:headEnd type="none" w="med" len="med"/>
+                      <a:tailEnd type="none" w="med" len="med"/>
+                    </a:lnB>
+                    <a:solidFill>
+                      <a:srgbClr val="F1F4F8"/>
+                    </a:solidFill>
+                  </a:tcPr>
+                </a:tc>
+                <a:tc>
+                  <a:txBody>
+                    <a:bodyPr/>
+                    <a:lstStyle/>
+                    <a:p>
+                      <a:pPr algn="l" indent="0" marL="0">
+                        <a:buNone/>
+                      </a:pPr>
+                      <a:r>
+                        <a:rPr lang="en-US" sz="1400" dirty="0">
+                          <a:solidFill>
+                            <a:srgbClr val="1B2A41"/>
+                          </a:solidFill>
+                          <a:latin typeface="Yu Gothic" pitchFamily="34" charset="0"/>
+                          <a:ea typeface="Yu Gothic" pitchFamily="34" charset="-122"/>
+                          <a:cs typeface="Yu Gothic" pitchFamily="34" charset="-120"/>
+                        </a:rPr>
+                        <a:t>【最重要】制御日を前日指示だけで判定し、当日速報による取り消しを無視していた</a:t>
+                      </a:r>
+                      <a:endParaRPr lang="en-US" sz="1400" dirty="0">
+                        <a:latin typeface="Yu Gothic" charset="0"/>
+                        <a:ea typeface="Yu Gothic" charset="0"/>
+                        <a:cs typeface="Yu Gothic" charset="0"/>
+                      </a:endParaRPr>
+                    </a:p>
+                  </a:txBody>
+                  <a:tcPr marL="91440" marR="91440" marT="36576" marB="36576" anchor="ctr">
+                    <a:lnL w="9525" cap="flat" cmpd="sng" algn="ctr">
+                      <a:solidFill>
+                        <a:srgbClr val="D5DCE6"/>
+                      </a:solidFill>
+                      <a:prstDash val="solid"/>
+                      <a:round/>
+                      <a:headEnd type="none" w="med" len="med"/>
+                      <a:tailEnd type="none" w="med" len="med"/>
+                    </a:lnL>
+                    <a:lnR w="9525" cap="flat" cmpd="sng" algn="ctr">
+                      <a:solidFill>
+                        <a:srgbClr val="D5DCE6"/>
+                      </a:solidFill>
+                      <a:prstDash val="solid"/>
+                      <a:round/>
+                      <a:headEnd type="none" w="med" len="med"/>
+                      <a:tailEnd type="none" w="med" len="med"/>
+                    </a:lnR>
+                    <a:lnT w="9525" cap="flat" cmpd="sng" algn="ctr">
+                      <a:solidFill>
+                        <a:srgbClr val="D5DCE6"/>
+                      </a:solidFill>
+                      <a:prstDash val="solid"/>
+                      <a:round/>
+                      <a:headEnd type="none" w="med" len="med"/>
+                      <a:tailEnd type="none" w="med" len="med"/>
+                    </a:lnT>
+                    <a:lnB w="9525" cap="flat" cmpd="sng" algn="ctr">
+                      <a:solidFill>
+                        <a:srgbClr val="D5DCE6"/>
+                      </a:solidFill>
+                      <a:prstDash val="solid"/>
+                      <a:round/>
+                      <a:headEnd type="none" w="med" len="med"/>
+                      <a:tailEnd type="none" w="med" len="med"/>
+                    </a:lnB>
+                    <a:solidFill>
+                      <a:srgbClr val="F1F4F8"/>
+                    </a:solidFill>
+                  </a:tcPr>
+                </a:tc>
+                <a:tc>
+                  <a:txBody>
+                    <a:bodyPr/>
+                    <a:lstStyle/>
+                    <a:p>
+                      <a:pPr algn="l" indent="0" marL="0">
+                        <a:buNone/>
+                      </a:pPr>
+                      <a:r>
+                        <a:rPr lang="en-US" sz="1400" dirty="0">
+                          <a:solidFill>
+                            <a:srgbClr val="1B2A41"/>
+                          </a:solidFill>
+                          <a:latin typeface="Yu Gothic" pitchFamily="34" charset="0"/>
+                          <a:ea typeface="Yu Gothic" pitchFamily="34" charset="-122"/>
+                          <a:cs typeface="Yu Gothic" pitchFamily="34" charset="-120"/>
+                        </a:rPr>
+                        <a:t>速報優先に修正。九州1175→715日、沖縄160→44日。全分析を再計算し信号が大幅に強化（d 0.73→1.07、AUC 0.852→0.904）</a:t>
+                      </a:r>
+                      <a:endParaRPr lang="en-US" sz="1400" dirty="0">
+                        <a:latin typeface="Yu Gothic" charset="0"/>
+                        <a:ea typeface="Yu Gothic" charset="0"/>
+                        <a:cs typeface="Yu Gothic" charset="0"/>
+                      </a:endParaRPr>
+                    </a:p>
+                  </a:txBody>
+                  <a:tcPr marL="91440" marR="91440" marT="36576" marB="36576" anchor="ctr">
+                    <a:lnL w="9525" cap="flat" cmpd="sng" algn="ctr">
+                      <a:solidFill>
+                        <a:srgbClr val="D5DCE6"/>
+                      </a:solidFill>
+                      <a:prstDash val="solid"/>
+                      <a:round/>
+                      <a:headEnd type="none" w="med" len="med"/>
+                      <a:tailEnd type="none" w="med" len="med"/>
+                    </a:lnL>
+                    <a:lnR w="9525" cap="flat" cmpd="sng" algn="ctr">
+                      <a:solidFill>
+                        <a:srgbClr val="D5DCE6"/>
+                      </a:solidFill>
+                      <a:prstDash val="solid"/>
+                      <a:round/>
+                      <a:headEnd type="none" w="med" len="med"/>
+                      <a:tailEnd type="none" w="med" len="med"/>
+                    </a:lnR>
+                    <a:lnT w="9525" cap="flat" cmpd="sng" algn="ctr">
+                      <a:solidFill>
+                        <a:srgbClr val="D5DCE6"/>
+                      </a:solidFill>
+                      <a:prstDash val="solid"/>
+                      <a:round/>
+                      <a:headEnd type="none" w="med" len="med"/>
+                      <a:tailEnd type="none" w="med" len="med"/>
+                    </a:lnT>
+                    <a:lnB w="9525" cap="flat" cmpd="sng" algn="ctr">
+                      <a:solidFill>
+                        <a:srgbClr val="D5DCE6"/>
+                      </a:solidFill>
+                      <a:prstDash val="solid"/>
+                      <a:round/>
+                      <a:headEnd type="none" w="med" len="med"/>
+                      <a:tailEnd type="none" w="med" len="med"/>
+                    </a:lnB>
+                    <a:solidFill>
+                      <a:srgbClr val="F1F4F8"/>
+                    </a:solidFill>
+                  </a:tcPr>
+                </a:tc>
+              </a:tr>
+            </a:tbl>
+          </a:graphicData>
+        </a:graphic>
+      </p:graphicFrame>
+      <p:sp>
+        <p:nvSpPr>
+          <p:cNvPr id="25" name="Slide Number Placeholder 0"/>
+          <p:cNvSpPr>
+            <a:spLocks noGrp="1"/>
+          </p:cNvSpPr>
+          <p:nvPr>
+            <p:ph type="sldNum" sz="quarter" idx="4294967295"/>
+          </p:nvPr>
+        </p:nvSpPr>
+        <p:spPr>
+          <a:xfrm>
+            <a:off x="11247120" y="6400800"/>
+            <a:ext cx="548640" cy="274320"/>
+          </a:xfrm>
+          <a:prstGeom prst="rect">
+            <a:avLst/>
+          </a:prstGeom>
+          <a:extLst>
+            <a:ext uri="{C572A759-6A51-4108-AA02-DFA0A04FC94B}">
+              <ma14:wrappingTextBoxFlag xmlns:ma14="http://schemas.microsoft.com/office/mac/drawingml/2011/main" val="0"/>
+            </a:ext>
+          </a:extLst>
+        </p:spPr>
+        <p:txBody>
+          <a:bodyPr/>
+          <a:lstStyle>
+            <a:lvl1pPr>
+              <a:defRPr sz="1200">
+                <a:solidFill>
+                  <a:srgbClr val="7A8BA3"/>
+                </a:solidFill>
+              </a:defRPr>
+            </a:lvl1pPr>
+          </a:lstStyle>
+          <a:p>
+            <a:pPr algn="r"/>
+            <a:fld id="{F7021451-1387-4CA6-816F-3879F97B5CBC}" type="slidenum">
+              <a:rPr b="0" lang="en-US"/>
+              <a:t>15</a:t>
+            </a:fld>
+            <a:endParaRPr lang="en-US"/>
+          </a:p>
+        </p:txBody>
+      </p:sp>
+    </p:spTree>
+  </p:cSld>
+  <p:clrMapOvr>
+    <a:masterClrMapping/>
+  </p:clrMapOvr>
+</p:sld>
+</file>
+
+<file path=ppt/slides/slide16.xml><?xml version="1.0" encoding="utf-8"?>
+<p:sld xmlns:a="http://schemas.openxmlformats.org/drawingml/2006/main" xmlns:r="http://schemas.openxmlformats.org/officeDocument/2006/relationships" xmlns:p="http://schemas.openxmlformats.org/presentationml/2006/main">
+  <p:cSld name="Slide 16">
+    <p:spTree>
+      <p:nvGrpSpPr>
+        <p:cNvPr id="1" name=""/>
+        <p:cNvGrpSpPr/>
+        <p:nvPr/>
+      </p:nvGrpSpPr>
+      <p:grpSpPr>
+        <a:xfrm>
+          <a:off x="0" y="0"/>
+          <a:ext cx="0" cy="0"/>
+          <a:chOff x="0" y="0"/>
+          <a:chExt cx="0" cy="0"/>
+        </a:xfrm>
+      </p:grpSpPr>
+      <p:sp>
+        <p:nvSpPr>
+          <p:cNvPr id="2" name="Text 0"/>
+          <p:cNvSpPr/>
+          <p:nvPr>
+            <p:ph idx="100" type="title" hasCustomPrompt="1"/>
+          </p:nvPr>
+        </p:nvSpPr>
+        <p:spPr>
+          <a:xfrm>
+            <a:off x="548640" y="320040"/>
+            <a:ext cx="11064240" cy="868680"/>
+          </a:xfrm>
+          <a:prstGeom prst="rect">
+            <a:avLst/>
+          </a:prstGeom>
+          <a:noFill/>
+          <a:ln/>
+        </p:spPr>
+        <p:txBody>
+          <a:bodyPr wrap="square" lIns="0" tIns="0" rIns="0" bIns="0" rtlCol="0" anchor="ctr"/>
+          <a:lstStyle/>
+          <a:p>
+            <a:pPr algn="l" indent="0" marL="0">
+              <a:buNone/>
+            </a:pPr>
+            <a:r>
+              <a:rPr lang="en-US" sz="3200" b="1" dirty="0">
+                <a:solidFill>
+                  <a:schemeClr val="tx1"/>
+                </a:solidFill>
+              </a:rPr>
               <a:t>限界と今後</a:t>
             </a:r>
             <a:endParaRPr lang="en-US" sz="3200" dirty="0"/>
@@ -5666,7 +8864,7 @@
             <a:pPr algn="r"/>
             <a:fld id="{F7021451-1387-4CA6-816F-3879F97B5CBC}" type="slidenum">
               <a:rPr b="0" lang="en-US"/>
-              <a:t>14</a:t>
+              <a:t>16</a:t>
             </a:fld>
             <a:endParaRPr lang="en-US"/>
           </a:p>
@@ -5680,9 +8878,9 @@
 </p:sld>
 </file>
 
-<file path=ppt/slides/slide15.xml><?xml version="1.0" encoding="utf-8"?>
+<file path=ppt/slides/slide17.xml><?xml version="1.0" encoding="utf-8"?>
 <p:sld xmlns:a="http://schemas.openxmlformats.org/drawingml/2006/main" xmlns:r="http://schemas.openxmlformats.org/officeDocument/2006/relationships" xmlns:p="http://schemas.openxmlformats.org/presentationml/2006/main">
-  <p:cSld name="Slide 15">
+  <p:cSld name="Slide 17">
     <p:spTree>
       <p:nvGrpSpPr>
         <p:cNvPr id="1" name=""/>
